--- a/docs/pptx/auc3/ritu-auc3-linsubhr-dosedisc-anyhosp.pptx
+++ b/docs/pptx/auc3/ritu-auc3-linsubhr-dosedisc-anyhosp.pptx
@@ -2443,7 +2443,7 @@
           </p:nvSpPr>
           <p:spPr>
             <a:xfrm>
-              <a:off x="980186" y="1896563"/>
+              <a:off x="980739" y="1896563"/>
               <a:ext cx="0" cy="3826579"/>
             </a:xfrm>
             <a:custGeom>
@@ -2486,7 +2486,7 @@
           </p:nvSpPr>
           <p:spPr>
             <a:xfrm>
-              <a:off x="3262630" y="1896563"/>
+              <a:off x="3260798" y="1896563"/>
               <a:ext cx="0" cy="3826579"/>
             </a:xfrm>
             <a:custGeom>
@@ -2529,7 +2529,7 @@
           </p:nvSpPr>
           <p:spPr>
             <a:xfrm>
-              <a:off x="5545073" y="1896563"/>
+              <a:off x="5540858" y="1896563"/>
               <a:ext cx="0" cy="3826579"/>
             </a:xfrm>
             <a:custGeom>
@@ -2572,7 +2572,7 @@
           </p:nvSpPr>
           <p:spPr>
             <a:xfrm>
-              <a:off x="7827517" y="1896563"/>
+              <a:off x="7820918" y="1896563"/>
               <a:ext cx="0" cy="3826579"/>
             </a:xfrm>
             <a:custGeom>
@@ -2830,7 +2830,7 @@
           </p:nvSpPr>
           <p:spPr>
             <a:xfrm>
-              <a:off x="2121408" y="1896563"/>
+              <a:off x="2120768" y="1896563"/>
               <a:ext cx="0" cy="3826579"/>
             </a:xfrm>
             <a:custGeom>
@@ -2873,7 +2873,7 @@
           </p:nvSpPr>
           <p:spPr>
             <a:xfrm>
-              <a:off x="4403852" y="1896563"/>
+              <a:off x="4400828" y="1896563"/>
               <a:ext cx="0" cy="3826579"/>
             </a:xfrm>
             <a:custGeom>
@@ -2916,7 +2916,7 @@
           </p:nvSpPr>
           <p:spPr>
             <a:xfrm>
-              <a:off x="6686295" y="1896563"/>
+              <a:off x="6680888" y="1896563"/>
               <a:ext cx="0" cy="3826579"/>
             </a:xfrm>
             <a:custGeom>
@@ -2959,612 +2959,612 @@
           </p:nvSpPr>
           <p:spPr>
             <a:xfrm>
-              <a:off x="1172049" y="2424848"/>
-              <a:ext cx="7090630" cy="2849991"/>
+              <a:off x="1172049" y="2391862"/>
+              <a:ext cx="7090630" cy="2897027"/>
             </a:xfrm>
             <a:custGeom>
               <a:avLst/>
               <a:pathLst>
-                <a:path w="7090630" h="2849991">
+                <a:path w="7090630" h="2897027">
                   <a:moveTo>
-                    <a:pt x="0" y="875143"/>
+                    <a:pt x="0" y="861243"/>
                   </a:moveTo>
                   <a:lnTo>
-                    <a:pt x="71622" y="922437"/>
-                  </a:lnTo>
-                  <a:lnTo>
-                    <a:pt x="143245" y="968737"/>
-                  </a:lnTo>
-                  <a:lnTo>
-                    <a:pt x="214867" y="1014063"/>
-                  </a:lnTo>
-                  <a:lnTo>
-                    <a:pt x="286490" y="1058436"/>
-                  </a:lnTo>
-                  <a:lnTo>
-                    <a:pt x="358112" y="1101876"/>
-                  </a:lnTo>
-                  <a:lnTo>
-                    <a:pt x="429735" y="1144403"/>
-                  </a:lnTo>
-                  <a:lnTo>
-                    <a:pt x="501357" y="1186036"/>
-                  </a:lnTo>
-                  <a:lnTo>
-                    <a:pt x="572980" y="1226793"/>
-                  </a:lnTo>
-                  <a:lnTo>
-                    <a:pt x="644602" y="1266693"/>
-                  </a:lnTo>
-                  <a:lnTo>
-                    <a:pt x="716225" y="1305754"/>
-                  </a:lnTo>
-                  <a:lnTo>
-                    <a:pt x="787847" y="1343994"/>
-                  </a:lnTo>
-                  <a:lnTo>
-                    <a:pt x="859470" y="1381429"/>
-                  </a:lnTo>
-                  <a:lnTo>
-                    <a:pt x="931092" y="1418078"/>
-                  </a:lnTo>
-                  <a:lnTo>
-                    <a:pt x="1002715" y="1453956"/>
-                  </a:lnTo>
-                  <a:lnTo>
-                    <a:pt x="1074337" y="1489080"/>
-                  </a:lnTo>
-                  <a:lnTo>
-                    <a:pt x="1145960" y="1523465"/>
-                  </a:lnTo>
-                  <a:lnTo>
-                    <a:pt x="1217582" y="1557127"/>
-                  </a:lnTo>
-                  <a:lnTo>
-                    <a:pt x="1289205" y="1590081"/>
-                  </a:lnTo>
-                  <a:lnTo>
-                    <a:pt x="1360827" y="1622342"/>
-                  </a:lnTo>
-                  <a:lnTo>
-                    <a:pt x="1432450" y="1653925"/>
-                  </a:lnTo>
-                  <a:lnTo>
-                    <a:pt x="1504073" y="1684844"/>
-                  </a:lnTo>
-                  <a:lnTo>
-                    <a:pt x="1575695" y="1715112"/>
-                  </a:lnTo>
-                  <a:lnTo>
-                    <a:pt x="1647318" y="1744745"/>
-                  </a:lnTo>
-                  <a:lnTo>
-                    <a:pt x="1718940" y="1773754"/>
-                  </a:lnTo>
-                  <a:lnTo>
-                    <a:pt x="1790563" y="1802153"/>
-                  </a:lnTo>
-                  <a:lnTo>
-                    <a:pt x="1862185" y="1829955"/>
-                  </a:lnTo>
-                  <a:lnTo>
-                    <a:pt x="1933808" y="1857172"/>
-                  </a:lnTo>
-                  <a:lnTo>
-                    <a:pt x="2005430" y="1883817"/>
-                  </a:lnTo>
-                  <a:lnTo>
-                    <a:pt x="2077053" y="1909902"/>
-                  </a:lnTo>
-                  <a:lnTo>
-                    <a:pt x="2148675" y="1935439"/>
-                  </a:lnTo>
-                  <a:lnTo>
-                    <a:pt x="2220298" y="1960438"/>
-                  </a:lnTo>
-                  <a:lnTo>
-                    <a:pt x="2291920" y="1984912"/>
-                  </a:lnTo>
-                  <a:lnTo>
-                    <a:pt x="2363543" y="2008871"/>
-                  </a:lnTo>
-                  <a:lnTo>
-                    <a:pt x="2435165" y="2032326"/>
-                  </a:lnTo>
-                  <a:lnTo>
-                    <a:pt x="2506788" y="2055288"/>
-                  </a:lnTo>
-                  <a:lnTo>
-                    <a:pt x="2578410" y="2077768"/>
-                  </a:lnTo>
-                  <a:lnTo>
-                    <a:pt x="2650033" y="2099774"/>
-                  </a:lnTo>
-                  <a:lnTo>
-                    <a:pt x="2721655" y="2121318"/>
-                  </a:lnTo>
-                  <a:lnTo>
-                    <a:pt x="2793278" y="2142409"/>
-                  </a:lnTo>
-                  <a:lnTo>
-                    <a:pt x="2864901" y="2163057"/>
-                  </a:lnTo>
-                  <a:lnTo>
-                    <a:pt x="2936523" y="2183270"/>
-                  </a:lnTo>
-                  <a:lnTo>
-                    <a:pt x="3008146" y="2203058"/>
-                  </a:lnTo>
-                  <a:lnTo>
-                    <a:pt x="3079768" y="2222430"/>
-                  </a:lnTo>
-                  <a:lnTo>
-                    <a:pt x="3151391" y="2241395"/>
-                  </a:lnTo>
-                  <a:lnTo>
-                    <a:pt x="3223013" y="2248789"/>
-                  </a:lnTo>
-                  <a:lnTo>
-                    <a:pt x="3294636" y="2227918"/>
-                  </a:lnTo>
-                  <a:lnTo>
-                    <a:pt x="3366258" y="2206549"/>
-                  </a:lnTo>
-                  <a:lnTo>
-                    <a:pt x="3437881" y="2184671"/>
-                  </a:lnTo>
-                  <a:lnTo>
-                    <a:pt x="3509503" y="2162272"/>
-                  </a:lnTo>
-                  <a:lnTo>
-                    <a:pt x="3581126" y="2139338"/>
-                  </a:lnTo>
-                  <a:lnTo>
-                    <a:pt x="3652748" y="2115858"/>
-                  </a:lnTo>
-                  <a:lnTo>
-                    <a:pt x="3724371" y="2091818"/>
-                  </a:lnTo>
-                  <a:lnTo>
-                    <a:pt x="3795993" y="2067205"/>
-                  </a:lnTo>
-                  <a:lnTo>
-                    <a:pt x="3867616" y="2042006"/>
-                  </a:lnTo>
-                  <a:lnTo>
-                    <a:pt x="3939238" y="2016205"/>
-                  </a:lnTo>
-                  <a:lnTo>
-                    <a:pt x="4010861" y="1989790"/>
-                  </a:lnTo>
-                  <a:lnTo>
-                    <a:pt x="4082483" y="1962745"/>
-                  </a:lnTo>
-                  <a:lnTo>
-                    <a:pt x="4154106" y="1935055"/>
-                  </a:lnTo>
-                  <a:lnTo>
-                    <a:pt x="4225729" y="1906705"/>
-                  </a:lnTo>
-                  <a:lnTo>
-                    <a:pt x="4297351" y="1877680"/>
-                  </a:lnTo>
-                  <a:lnTo>
-                    <a:pt x="4368974" y="1847963"/>
-                  </a:lnTo>
-                  <a:lnTo>
-                    <a:pt x="4440596" y="1817537"/>
-                  </a:lnTo>
-                  <a:lnTo>
-                    <a:pt x="4512219" y="1786386"/>
-                  </a:lnTo>
-                  <a:lnTo>
-                    <a:pt x="4583841" y="1754492"/>
-                  </a:lnTo>
-                  <a:lnTo>
-                    <a:pt x="4655464" y="1721838"/>
-                  </a:lnTo>
-                  <a:lnTo>
-                    <a:pt x="4727086" y="1688406"/>
-                  </a:lnTo>
-                  <a:lnTo>
-                    <a:pt x="4798709" y="1654177"/>
-                  </a:lnTo>
-                  <a:lnTo>
-                    <a:pt x="4870331" y="1619132"/>
-                  </a:lnTo>
-                  <a:lnTo>
-                    <a:pt x="4941954" y="1583251"/>
-                  </a:lnTo>
-                  <a:lnTo>
-                    <a:pt x="5013576" y="1546515"/>
-                  </a:lnTo>
-                  <a:lnTo>
-                    <a:pt x="5085199" y="1508904"/>
-                  </a:lnTo>
-                  <a:lnTo>
-                    <a:pt x="5156821" y="1470396"/>
-                  </a:lnTo>
-                  <a:lnTo>
-                    <a:pt x="5228444" y="1430970"/>
-                  </a:lnTo>
-                  <a:lnTo>
-                    <a:pt x="5300066" y="1390604"/>
-                  </a:lnTo>
-                  <a:lnTo>
-                    <a:pt x="5371689" y="1349276"/>
-                  </a:lnTo>
-                  <a:lnTo>
-                    <a:pt x="5443311" y="1306963"/>
-                  </a:lnTo>
-                  <a:lnTo>
-                    <a:pt x="5514934" y="1263641"/>
-                  </a:lnTo>
-                  <a:lnTo>
-                    <a:pt x="5586557" y="1219287"/>
-                  </a:lnTo>
-                  <a:lnTo>
-                    <a:pt x="5658179" y="1173875"/>
-                  </a:lnTo>
-                  <a:lnTo>
-                    <a:pt x="5729802" y="1127381"/>
-                  </a:lnTo>
-                  <a:lnTo>
-                    <a:pt x="5801424" y="1079779"/>
-                  </a:lnTo>
-                  <a:lnTo>
-                    <a:pt x="5873047" y="1031041"/>
-                  </a:lnTo>
-                  <a:lnTo>
-                    <a:pt x="5944669" y="981142"/>
-                  </a:lnTo>
-                  <a:lnTo>
-                    <a:pt x="6016292" y="930054"/>
-                  </a:lnTo>
-                  <a:lnTo>
-                    <a:pt x="6087914" y="877748"/>
-                  </a:lnTo>
-                  <a:lnTo>
-                    <a:pt x="6159537" y="824195"/>
-                  </a:lnTo>
-                  <a:lnTo>
-                    <a:pt x="6231159" y="769365"/>
-                  </a:lnTo>
-                  <a:lnTo>
-                    <a:pt x="6302782" y="713228"/>
-                  </a:lnTo>
-                  <a:lnTo>
-                    <a:pt x="6374404" y="655754"/>
-                  </a:lnTo>
-                  <a:lnTo>
-                    <a:pt x="6446027" y="596909"/>
-                  </a:lnTo>
-                  <a:lnTo>
-                    <a:pt x="6517649" y="536661"/>
-                  </a:lnTo>
-                  <a:lnTo>
-                    <a:pt x="6589272" y="474978"/>
-                  </a:lnTo>
-                  <a:lnTo>
-                    <a:pt x="6660894" y="411824"/>
-                  </a:lnTo>
-                  <a:lnTo>
-                    <a:pt x="6732517" y="347164"/>
-                  </a:lnTo>
-                  <a:lnTo>
-                    <a:pt x="6804139" y="280964"/>
-                  </a:lnTo>
-                  <a:lnTo>
-                    <a:pt x="6875762" y="213185"/>
-                  </a:lnTo>
-                  <a:lnTo>
-                    <a:pt x="6947385" y="143790"/>
-                  </a:lnTo>
-                  <a:lnTo>
-                    <a:pt x="7019007" y="72742"/>
+                    <a:pt x="71622" y="911184"/>
+                  </a:lnTo>
+                  <a:lnTo>
+                    <a:pt x="143245" y="960039"/>
+                  </a:lnTo>
+                  <a:lnTo>
+                    <a:pt x="214867" y="1007832"/>
+                  </a:lnTo>
+                  <a:lnTo>
+                    <a:pt x="286490" y="1054585"/>
+                  </a:lnTo>
+                  <a:lnTo>
+                    <a:pt x="358112" y="1100321"/>
+                  </a:lnTo>
+                  <a:lnTo>
+                    <a:pt x="429735" y="1145063"/>
+                  </a:lnTo>
+                  <a:lnTo>
+                    <a:pt x="501357" y="1188831"/>
+                  </a:lnTo>
+                  <a:lnTo>
+                    <a:pt x="572980" y="1231647"/>
+                  </a:lnTo>
+                  <a:lnTo>
+                    <a:pt x="644602" y="1273532"/>
+                  </a:lnTo>
+                  <a:lnTo>
+                    <a:pt x="716225" y="1314506"/>
+                  </a:lnTo>
+                  <a:lnTo>
+                    <a:pt x="787847" y="1354589"/>
+                  </a:lnTo>
+                  <a:lnTo>
+                    <a:pt x="859470" y="1393800"/>
+                  </a:lnTo>
+                  <a:lnTo>
+                    <a:pt x="931092" y="1432158"/>
+                  </a:lnTo>
+                  <a:lnTo>
+                    <a:pt x="1002715" y="1469682"/>
+                  </a:lnTo>
+                  <a:lnTo>
+                    <a:pt x="1074337" y="1506389"/>
+                  </a:lnTo>
+                  <a:lnTo>
+                    <a:pt x="1145960" y="1542299"/>
+                  </a:lnTo>
+                  <a:lnTo>
+                    <a:pt x="1217582" y="1577427"/>
+                  </a:lnTo>
+                  <a:lnTo>
+                    <a:pt x="1289205" y="1611791"/>
+                  </a:lnTo>
+                  <a:lnTo>
+                    <a:pt x="1360827" y="1645408"/>
+                  </a:lnTo>
+                  <a:lnTo>
+                    <a:pt x="1432450" y="1678293"/>
+                  </a:lnTo>
+                  <a:lnTo>
+                    <a:pt x="1504073" y="1710463"/>
+                  </a:lnTo>
+                  <a:lnTo>
+                    <a:pt x="1575695" y="1741934"/>
+                  </a:lnTo>
+                  <a:lnTo>
+                    <a:pt x="1647318" y="1772720"/>
+                  </a:lnTo>
+                  <a:lnTo>
+                    <a:pt x="1718940" y="1802836"/>
+                  </a:lnTo>
+                  <a:lnTo>
+                    <a:pt x="1790563" y="1832297"/>
+                  </a:lnTo>
+                  <a:lnTo>
+                    <a:pt x="1862185" y="1861118"/>
+                  </a:lnTo>
+                  <a:lnTo>
+                    <a:pt x="1933808" y="1889312"/>
+                  </a:lnTo>
+                  <a:lnTo>
+                    <a:pt x="2005430" y="1916892"/>
+                  </a:lnTo>
+                  <a:lnTo>
+                    <a:pt x="2077053" y="1943873"/>
+                  </a:lnTo>
+                  <a:lnTo>
+                    <a:pt x="2148675" y="1970266"/>
+                  </a:lnTo>
+                  <a:lnTo>
+                    <a:pt x="2220298" y="1996086"/>
+                  </a:lnTo>
+                  <a:lnTo>
+                    <a:pt x="2291920" y="2021344"/>
+                  </a:lnTo>
+                  <a:lnTo>
+                    <a:pt x="2363543" y="2046052"/>
+                  </a:lnTo>
+                  <a:lnTo>
+                    <a:pt x="2435165" y="2070224"/>
+                  </a:lnTo>
+                  <a:lnTo>
+                    <a:pt x="2506788" y="2093869"/>
+                  </a:lnTo>
+                  <a:lnTo>
+                    <a:pt x="2578410" y="2117000"/>
+                  </a:lnTo>
+                  <a:lnTo>
+                    <a:pt x="2650033" y="2139628"/>
+                  </a:lnTo>
+                  <a:lnTo>
+                    <a:pt x="2721655" y="2161764"/>
+                  </a:lnTo>
+                  <a:lnTo>
+                    <a:pt x="2793278" y="2183419"/>
+                  </a:lnTo>
+                  <a:lnTo>
+                    <a:pt x="2864901" y="2204602"/>
+                  </a:lnTo>
+                  <a:lnTo>
+                    <a:pt x="2936523" y="2225325"/>
+                  </a:lnTo>
+                  <a:lnTo>
+                    <a:pt x="3008146" y="2245597"/>
+                  </a:lnTo>
+                  <a:lnTo>
+                    <a:pt x="3079768" y="2265428"/>
+                  </a:lnTo>
+                  <a:lnTo>
+                    <a:pt x="3151391" y="2284828"/>
+                  </a:lnTo>
+                  <a:lnTo>
+                    <a:pt x="3223013" y="2270079"/>
+                  </a:lnTo>
+                  <a:lnTo>
+                    <a:pt x="3294636" y="2248975"/>
+                  </a:lnTo>
+                  <a:lnTo>
+                    <a:pt x="3366258" y="2227370"/>
+                  </a:lnTo>
+                  <a:lnTo>
+                    <a:pt x="3437881" y="2205251"/>
+                  </a:lnTo>
+                  <a:lnTo>
+                    <a:pt x="3509503" y="2182605"/>
+                  </a:lnTo>
+                  <a:lnTo>
+                    <a:pt x="3581126" y="2159421"/>
+                  </a:lnTo>
+                  <a:lnTo>
+                    <a:pt x="3652748" y="2135686"/>
+                  </a:lnTo>
+                  <a:lnTo>
+                    <a:pt x="3724371" y="2111386"/>
+                  </a:lnTo>
+                  <a:lnTo>
+                    <a:pt x="3795993" y="2086508"/>
+                  </a:lnTo>
+                  <a:lnTo>
+                    <a:pt x="3867616" y="2061039"/>
+                  </a:lnTo>
+                  <a:lnTo>
+                    <a:pt x="3939238" y="2034963"/>
+                  </a:lnTo>
+                  <a:lnTo>
+                    <a:pt x="4010861" y="2008268"/>
+                  </a:lnTo>
+                  <a:lnTo>
+                    <a:pt x="4082483" y="1980937"/>
+                  </a:lnTo>
+                  <a:lnTo>
+                    <a:pt x="4154106" y="1952956"/>
+                  </a:lnTo>
+                  <a:lnTo>
+                    <a:pt x="4225729" y="1924310"/>
+                  </a:lnTo>
+                  <a:lnTo>
+                    <a:pt x="4297351" y="1894983"/>
+                  </a:lnTo>
+                  <a:lnTo>
+                    <a:pt x="4368974" y="1864958"/>
+                  </a:lnTo>
+                  <a:lnTo>
+                    <a:pt x="4440596" y="1834219"/>
+                  </a:lnTo>
+                  <a:lnTo>
+                    <a:pt x="4512219" y="1802748"/>
+                  </a:lnTo>
+                  <a:lnTo>
+                    <a:pt x="4583841" y="1770530"/>
+                  </a:lnTo>
+                  <a:lnTo>
+                    <a:pt x="4655464" y="1737545"/>
+                  </a:lnTo>
+                  <a:lnTo>
+                    <a:pt x="4727086" y="1703775"/>
+                  </a:lnTo>
+                  <a:lnTo>
+                    <a:pt x="4798709" y="1669202"/>
+                  </a:lnTo>
+                  <a:lnTo>
+                    <a:pt x="4870331" y="1633807"/>
+                  </a:lnTo>
+                  <a:lnTo>
+                    <a:pt x="4941954" y="1597570"/>
+                  </a:lnTo>
+                  <a:lnTo>
+                    <a:pt x="5013576" y="1560471"/>
+                  </a:lnTo>
+                  <a:lnTo>
+                    <a:pt x="5085199" y="1522490"/>
+                  </a:lnTo>
+                  <a:lnTo>
+                    <a:pt x="5156821" y="1483605"/>
+                  </a:lnTo>
+                  <a:lnTo>
+                    <a:pt x="5228444" y="1443796"/>
+                  </a:lnTo>
+                  <a:lnTo>
+                    <a:pt x="5300066" y="1403039"/>
+                  </a:lnTo>
+                  <a:lnTo>
+                    <a:pt x="5371689" y="1361313"/>
+                  </a:lnTo>
+                  <a:lnTo>
+                    <a:pt x="5443311" y="1318595"/>
+                  </a:lnTo>
+                  <a:lnTo>
+                    <a:pt x="5514934" y="1274861"/>
+                  </a:lnTo>
+                  <a:lnTo>
+                    <a:pt x="5586557" y="1230086"/>
+                  </a:lnTo>
+                  <a:lnTo>
+                    <a:pt x="5658179" y="1184247"/>
+                  </a:lnTo>
+                  <a:lnTo>
+                    <a:pt x="5729802" y="1137317"/>
+                  </a:lnTo>
+                  <a:lnTo>
+                    <a:pt x="5801424" y="1089271"/>
+                  </a:lnTo>
+                  <a:lnTo>
+                    <a:pt x="5873047" y="1040083"/>
+                  </a:lnTo>
+                  <a:lnTo>
+                    <a:pt x="5944669" y="989724"/>
+                  </a:lnTo>
+                  <a:lnTo>
+                    <a:pt x="6016292" y="938168"/>
+                  </a:lnTo>
+                  <a:lnTo>
+                    <a:pt x="6087914" y="885385"/>
+                  </a:lnTo>
+                  <a:lnTo>
+                    <a:pt x="6159537" y="831347"/>
+                  </a:lnTo>
+                  <a:lnTo>
+                    <a:pt x="6231159" y="776023"/>
+                  </a:lnTo>
+                  <a:lnTo>
+                    <a:pt x="6302782" y="719384"/>
+                  </a:lnTo>
+                  <a:lnTo>
+                    <a:pt x="6374404" y="661398"/>
+                  </a:lnTo>
+                  <a:lnTo>
+                    <a:pt x="6446027" y="602032"/>
+                  </a:lnTo>
+                  <a:lnTo>
+                    <a:pt x="6517649" y="541255"/>
+                  </a:lnTo>
+                  <a:lnTo>
+                    <a:pt x="6589272" y="479032"/>
+                  </a:lnTo>
+                  <a:lnTo>
+                    <a:pt x="6660894" y="415328"/>
+                  </a:lnTo>
+                  <a:lnTo>
+                    <a:pt x="6732517" y="350110"/>
+                  </a:lnTo>
+                  <a:lnTo>
+                    <a:pt x="6804139" y="283341"/>
+                  </a:lnTo>
+                  <a:lnTo>
+                    <a:pt x="6875762" y="214983"/>
+                  </a:lnTo>
+                  <a:lnTo>
+                    <a:pt x="6947385" y="145000"/>
+                  </a:lnTo>
+                  <a:lnTo>
+                    <a:pt x="7019007" y="73352"/>
                   </a:lnTo>
                   <a:lnTo>
                     <a:pt x="7090630" y="0"/>
                   </a:lnTo>
                   <a:lnTo>
-                    <a:pt x="7090630" y="2849991"/>
-                  </a:lnTo>
-                  <a:lnTo>
-                    <a:pt x="7019007" y="2844098"/>
-                  </a:lnTo>
-                  <a:lnTo>
-                    <a:pt x="6947385" y="2838078"/>
-                  </a:lnTo>
-                  <a:lnTo>
-                    <a:pt x="6875762" y="2831930"/>
-                  </a:lnTo>
-                  <a:lnTo>
-                    <a:pt x="6804139" y="2825649"/>
-                  </a:lnTo>
-                  <a:lnTo>
-                    <a:pt x="6732517" y="2819233"/>
-                  </a:lnTo>
-                  <a:lnTo>
-                    <a:pt x="6660894" y="2812679"/>
-                  </a:lnTo>
-                  <a:lnTo>
-                    <a:pt x="6589272" y="2805985"/>
-                  </a:lnTo>
-                  <a:lnTo>
-                    <a:pt x="6517649" y="2799146"/>
-                  </a:lnTo>
-                  <a:lnTo>
-                    <a:pt x="6446027" y="2792161"/>
-                  </a:lnTo>
-                  <a:lnTo>
-                    <a:pt x="6374404" y="2785026"/>
-                  </a:lnTo>
-                  <a:lnTo>
-                    <a:pt x="6302782" y="2777738"/>
-                  </a:lnTo>
-                  <a:lnTo>
-                    <a:pt x="6231159" y="2770293"/>
-                  </a:lnTo>
-                  <a:lnTo>
-                    <a:pt x="6159537" y="2762688"/>
-                  </a:lnTo>
-                  <a:lnTo>
-                    <a:pt x="6087914" y="2754920"/>
-                  </a:lnTo>
-                  <a:lnTo>
-                    <a:pt x="6016292" y="2746985"/>
-                  </a:lnTo>
-                  <a:lnTo>
-                    <a:pt x="5944669" y="2738879"/>
-                  </a:lnTo>
-                  <a:lnTo>
-                    <a:pt x="5873047" y="2730600"/>
-                  </a:lnTo>
-                  <a:lnTo>
-                    <a:pt x="5801424" y="2722142"/>
-                  </a:lnTo>
-                  <a:lnTo>
-                    <a:pt x="5729802" y="2713503"/>
-                  </a:lnTo>
-                  <a:lnTo>
-                    <a:pt x="5658179" y="2704679"/>
-                  </a:lnTo>
-                  <a:lnTo>
-                    <a:pt x="5586557" y="2695665"/>
-                  </a:lnTo>
-                  <a:lnTo>
-                    <a:pt x="5514934" y="2686457"/>
-                  </a:lnTo>
-                  <a:lnTo>
-                    <a:pt x="5443311" y="2677051"/>
-                  </a:lnTo>
-                  <a:lnTo>
-                    <a:pt x="5371689" y="2667444"/>
-                  </a:lnTo>
-                  <a:lnTo>
-                    <a:pt x="5300066" y="2657630"/>
-                  </a:lnTo>
-                  <a:lnTo>
-                    <a:pt x="5228444" y="2647605"/>
-                  </a:lnTo>
-                  <a:lnTo>
-                    <a:pt x="5156821" y="2637365"/>
-                  </a:lnTo>
-                  <a:lnTo>
-                    <a:pt x="5085199" y="2626905"/>
-                  </a:lnTo>
-                  <a:lnTo>
-                    <a:pt x="5013576" y="2616221"/>
-                  </a:lnTo>
-                  <a:lnTo>
-                    <a:pt x="4941954" y="2605307"/>
-                  </a:lnTo>
-                  <a:lnTo>
-                    <a:pt x="4870331" y="2594158"/>
-                  </a:lnTo>
-                  <a:lnTo>
-                    <a:pt x="4798709" y="2582770"/>
-                  </a:lnTo>
-                  <a:lnTo>
-                    <a:pt x="4727086" y="2571138"/>
-                  </a:lnTo>
-                  <a:lnTo>
-                    <a:pt x="4655464" y="2559255"/>
-                  </a:lnTo>
-                  <a:lnTo>
-                    <a:pt x="4583841" y="2547118"/>
-                  </a:lnTo>
-                  <a:lnTo>
-                    <a:pt x="4512219" y="2534719"/>
-                  </a:lnTo>
-                  <a:lnTo>
-                    <a:pt x="4440596" y="2522055"/>
-                  </a:lnTo>
-                  <a:lnTo>
-                    <a:pt x="4368974" y="2509118"/>
-                  </a:lnTo>
-                  <a:lnTo>
-                    <a:pt x="4297351" y="2495904"/>
-                  </a:lnTo>
-                  <a:lnTo>
-                    <a:pt x="4225729" y="2482405"/>
-                  </a:lnTo>
-                  <a:lnTo>
-                    <a:pt x="4154106" y="2468617"/>
-                  </a:lnTo>
-                  <a:lnTo>
-                    <a:pt x="4082483" y="2454533"/>
-                  </a:lnTo>
-                  <a:lnTo>
-                    <a:pt x="4010861" y="2440146"/>
-                  </a:lnTo>
-                  <a:lnTo>
-                    <a:pt x="3939238" y="2425450"/>
-                  </a:lnTo>
-                  <a:lnTo>
-                    <a:pt x="3867616" y="2410438"/>
-                  </a:lnTo>
-                  <a:lnTo>
-                    <a:pt x="3795993" y="2395104"/>
-                  </a:lnTo>
-                  <a:lnTo>
-                    <a:pt x="3724371" y="2379441"/>
-                  </a:lnTo>
-                  <a:lnTo>
-                    <a:pt x="3652748" y="2363441"/>
-                  </a:lnTo>
-                  <a:lnTo>
-                    <a:pt x="3581126" y="2347097"/>
-                  </a:lnTo>
-                  <a:lnTo>
-                    <a:pt x="3509503" y="2330403"/>
-                  </a:lnTo>
-                  <a:lnTo>
-                    <a:pt x="3437881" y="2313350"/>
-                  </a:lnTo>
-                  <a:lnTo>
-                    <a:pt x="3366258" y="2295930"/>
-                  </a:lnTo>
-                  <a:lnTo>
-                    <a:pt x="3294636" y="2278137"/>
-                  </a:lnTo>
-                  <a:lnTo>
-                    <a:pt x="3223013" y="2259961"/>
-                  </a:lnTo>
-                  <a:lnTo>
-                    <a:pt x="3151391" y="2269174"/>
-                  </a:lnTo>
-                  <a:lnTo>
-                    <a:pt x="3079768" y="2289085"/>
-                  </a:lnTo>
-                  <a:lnTo>
-                    <a:pt x="3008146" y="2308532"/>
-                  </a:lnTo>
-                  <a:lnTo>
-                    <a:pt x="2936523" y="2327526"/>
-                  </a:lnTo>
-                  <a:lnTo>
-                    <a:pt x="2864901" y="2346079"/>
-                  </a:lnTo>
-                  <a:lnTo>
-                    <a:pt x="2793278" y="2364199"/>
-                  </a:lnTo>
-                  <a:lnTo>
-                    <a:pt x="2721655" y="2381897"/>
-                  </a:lnTo>
-                  <a:lnTo>
-                    <a:pt x="2650033" y="2399183"/>
-                  </a:lnTo>
-                  <a:lnTo>
-                    <a:pt x="2578410" y="2416067"/>
-                  </a:lnTo>
-                  <a:lnTo>
-                    <a:pt x="2506788" y="2432557"/>
-                  </a:lnTo>
-                  <a:lnTo>
-                    <a:pt x="2435165" y="2448664"/>
-                  </a:lnTo>
-                  <a:lnTo>
-                    <a:pt x="2363543" y="2464396"/>
-                  </a:lnTo>
-                  <a:lnTo>
-                    <a:pt x="2291920" y="2479761"/>
-                  </a:lnTo>
-                  <a:lnTo>
-                    <a:pt x="2220298" y="2494769"/>
-                  </a:lnTo>
-                  <a:lnTo>
-                    <a:pt x="2148675" y="2509427"/>
-                  </a:lnTo>
-                  <a:lnTo>
-                    <a:pt x="2077053" y="2523744"/>
-                  </a:lnTo>
-                  <a:lnTo>
-                    <a:pt x="2005430" y="2537728"/>
-                  </a:lnTo>
-                  <a:lnTo>
-                    <a:pt x="1933808" y="2551386"/>
-                  </a:lnTo>
-                  <a:lnTo>
-                    <a:pt x="1862185" y="2564726"/>
-                  </a:lnTo>
-                  <a:lnTo>
-                    <a:pt x="1790563" y="2577756"/>
-                  </a:lnTo>
-                  <a:lnTo>
-                    <a:pt x="1718940" y="2590482"/>
-                  </a:lnTo>
-                  <a:lnTo>
-                    <a:pt x="1647318" y="2602912"/>
-                  </a:lnTo>
-                  <a:lnTo>
-                    <a:pt x="1575695" y="2615052"/>
-                  </a:lnTo>
-                  <a:lnTo>
-                    <a:pt x="1504073" y="2626910"/>
-                  </a:lnTo>
-                  <a:lnTo>
-                    <a:pt x="1432450" y="2638492"/>
-                  </a:lnTo>
-                  <a:lnTo>
-                    <a:pt x="1360827" y="2649804"/>
-                  </a:lnTo>
-                  <a:lnTo>
-                    <a:pt x="1289205" y="2660852"/>
-                  </a:lnTo>
-                  <a:lnTo>
-                    <a:pt x="1217582" y="2671644"/>
-                  </a:lnTo>
-                  <a:lnTo>
-                    <a:pt x="1145960" y="2682184"/>
-                  </a:lnTo>
-                  <a:lnTo>
-                    <a:pt x="1074337" y="2692479"/>
-                  </a:lnTo>
-                  <a:lnTo>
-                    <a:pt x="1002715" y="2702534"/>
-                  </a:lnTo>
-                  <a:lnTo>
-                    <a:pt x="931092" y="2712355"/>
-                  </a:lnTo>
-                  <a:lnTo>
-                    <a:pt x="859470" y="2721947"/>
-                  </a:lnTo>
-                  <a:lnTo>
-                    <a:pt x="787847" y="2731316"/>
-                  </a:lnTo>
-                  <a:lnTo>
-                    <a:pt x="716225" y="2740467"/>
-                  </a:lnTo>
-                  <a:lnTo>
-                    <a:pt x="644602" y="2749405"/>
-                  </a:lnTo>
-                  <a:lnTo>
-                    <a:pt x="572980" y="2758135"/>
-                  </a:lnTo>
-                  <a:lnTo>
-                    <a:pt x="501357" y="2766661"/>
-                  </a:lnTo>
-                  <a:lnTo>
-                    <a:pt x="429735" y="2774989"/>
-                  </a:lnTo>
-                  <a:lnTo>
-                    <a:pt x="358112" y="2783124"/>
-                  </a:lnTo>
-                  <a:lnTo>
-                    <a:pt x="286490" y="2791068"/>
-                  </a:lnTo>
-                  <a:lnTo>
-                    <a:pt x="214867" y="2798828"/>
-                  </a:lnTo>
-                  <a:lnTo>
-                    <a:pt x="143245" y="2806407"/>
-                  </a:lnTo>
-                  <a:lnTo>
-                    <a:pt x="71622" y="2813810"/>
-                  </a:lnTo>
-                  <a:lnTo>
-                    <a:pt x="0" y="2821040"/>
+                    <a:pt x="7090630" y="2897027"/>
+                  </a:lnTo>
+                  <a:lnTo>
+                    <a:pt x="7019007" y="2891239"/>
+                  </a:lnTo>
+                  <a:lnTo>
+                    <a:pt x="6947385" y="2885323"/>
+                  </a:lnTo>
+                  <a:lnTo>
+                    <a:pt x="6875762" y="2879275"/>
+                  </a:lnTo>
+                  <a:lnTo>
+                    <a:pt x="6804139" y="2873092"/>
+                  </a:lnTo>
+                  <a:lnTo>
+                    <a:pt x="6732517" y="2866772"/>
+                  </a:lnTo>
+                  <a:lnTo>
+                    <a:pt x="6660894" y="2860311"/>
+                  </a:lnTo>
+                  <a:lnTo>
+                    <a:pt x="6589272" y="2853707"/>
+                  </a:lnTo>
+                  <a:lnTo>
+                    <a:pt x="6517649" y="2846956"/>
+                  </a:lnTo>
+                  <a:lnTo>
+                    <a:pt x="6446027" y="2840055"/>
+                  </a:lnTo>
+                  <a:lnTo>
+                    <a:pt x="6374404" y="2833000"/>
+                  </a:lnTo>
+                  <a:lnTo>
+                    <a:pt x="6302782" y="2825789"/>
+                  </a:lnTo>
+                  <a:lnTo>
+                    <a:pt x="6231159" y="2818417"/>
+                  </a:lnTo>
+                  <a:lnTo>
+                    <a:pt x="6159537" y="2810881"/>
+                  </a:lnTo>
+                  <a:lnTo>
+                    <a:pt x="6087914" y="2803178"/>
+                  </a:lnTo>
+                  <a:lnTo>
+                    <a:pt x="6016292" y="2795303"/>
+                  </a:lnTo>
+                  <a:lnTo>
+                    <a:pt x="5944669" y="2787253"/>
+                  </a:lnTo>
+                  <a:lnTo>
+                    <a:pt x="5873047" y="2779025"/>
+                  </a:lnTo>
+                  <a:lnTo>
+                    <a:pt x="5801424" y="2770613"/>
+                  </a:lnTo>
+                  <a:lnTo>
+                    <a:pt x="5729802" y="2762014"/>
+                  </a:lnTo>
+                  <a:lnTo>
+                    <a:pt x="5658179" y="2753225"/>
+                  </a:lnTo>
+                  <a:lnTo>
+                    <a:pt x="5586557" y="2744239"/>
+                  </a:lnTo>
+                  <a:lnTo>
+                    <a:pt x="5514934" y="2735054"/>
+                  </a:lnTo>
+                  <a:lnTo>
+                    <a:pt x="5443311" y="2725665"/>
+                  </a:lnTo>
+                  <a:lnTo>
+                    <a:pt x="5371689" y="2716067"/>
+                  </a:lnTo>
+                  <a:lnTo>
+                    <a:pt x="5300066" y="2706256"/>
+                  </a:lnTo>
+                  <a:lnTo>
+                    <a:pt x="5228444" y="2696226"/>
+                  </a:lnTo>
+                  <a:lnTo>
+                    <a:pt x="5156821" y="2685973"/>
+                  </a:lnTo>
+                  <a:lnTo>
+                    <a:pt x="5085199" y="2675493"/>
+                  </a:lnTo>
+                  <a:lnTo>
+                    <a:pt x="5013576" y="2664779"/>
+                  </a:lnTo>
+                  <a:lnTo>
+                    <a:pt x="4941954" y="2653827"/>
+                  </a:lnTo>
+                  <a:lnTo>
+                    <a:pt x="4870331" y="2642632"/>
+                  </a:lnTo>
+                  <a:lnTo>
+                    <a:pt x="4798709" y="2631188"/>
+                  </a:lnTo>
+                  <a:lnTo>
+                    <a:pt x="4727086" y="2619489"/>
+                  </a:lnTo>
+                  <a:lnTo>
+                    <a:pt x="4655464" y="2607531"/>
+                  </a:lnTo>
+                  <a:lnTo>
+                    <a:pt x="4583841" y="2595306"/>
+                  </a:lnTo>
+                  <a:lnTo>
+                    <a:pt x="4512219" y="2582809"/>
+                  </a:lnTo>
+                  <a:lnTo>
+                    <a:pt x="4440596" y="2570035"/>
+                  </a:lnTo>
+                  <a:lnTo>
+                    <a:pt x="4368974" y="2556977"/>
+                  </a:lnTo>
+                  <a:lnTo>
+                    <a:pt x="4297351" y="2543628"/>
+                  </a:lnTo>
+                  <a:lnTo>
+                    <a:pt x="4225729" y="2529983"/>
+                  </a:lnTo>
+                  <a:lnTo>
+                    <a:pt x="4154106" y="2516034"/>
+                  </a:lnTo>
+                  <a:lnTo>
+                    <a:pt x="4082483" y="2501775"/>
+                  </a:lnTo>
+                  <a:lnTo>
+                    <a:pt x="4010861" y="2487199"/>
+                  </a:lnTo>
+                  <a:lnTo>
+                    <a:pt x="3939238" y="2472299"/>
+                  </a:lnTo>
+                  <a:lnTo>
+                    <a:pt x="3867616" y="2457067"/>
+                  </a:lnTo>
+                  <a:lnTo>
+                    <a:pt x="3795993" y="2441497"/>
+                  </a:lnTo>
+                  <a:lnTo>
+                    <a:pt x="3724371" y="2425581"/>
+                  </a:lnTo>
+                  <a:lnTo>
+                    <a:pt x="3652748" y="2409311"/>
+                  </a:lnTo>
+                  <a:lnTo>
+                    <a:pt x="3581126" y="2392679"/>
+                  </a:lnTo>
+                  <a:lnTo>
+                    <a:pt x="3509503" y="2375677"/>
+                  </a:lnTo>
+                  <a:lnTo>
+                    <a:pt x="3437881" y="2358297"/>
+                  </a:lnTo>
+                  <a:lnTo>
+                    <a:pt x="3366258" y="2340531"/>
+                  </a:lnTo>
+                  <a:lnTo>
+                    <a:pt x="3294636" y="2322370"/>
+                  </a:lnTo>
+                  <a:lnTo>
+                    <a:pt x="3223013" y="2303805"/>
+                  </a:lnTo>
+                  <a:lnTo>
+                    <a:pt x="3151391" y="2290692"/>
+                  </a:lnTo>
+                  <a:lnTo>
+                    <a:pt x="3079768" y="2310826"/>
+                  </a:lnTo>
+                  <a:lnTo>
+                    <a:pt x="3008146" y="2330493"/>
+                  </a:lnTo>
+                  <a:lnTo>
+                    <a:pt x="2936523" y="2349702"/>
+                  </a:lnTo>
+                  <a:lnTo>
+                    <a:pt x="2864901" y="2368466"/>
+                  </a:lnTo>
+                  <a:lnTo>
+                    <a:pt x="2793278" y="2386793"/>
+                  </a:lnTo>
+                  <a:lnTo>
+                    <a:pt x="2721655" y="2404695"/>
+                  </a:lnTo>
+                  <a:lnTo>
+                    <a:pt x="2650033" y="2422180"/>
+                  </a:lnTo>
+                  <a:lnTo>
+                    <a:pt x="2578410" y="2439260"/>
+                  </a:lnTo>
+                  <a:lnTo>
+                    <a:pt x="2506788" y="2455942"/>
+                  </a:lnTo>
+                  <a:lnTo>
+                    <a:pt x="2435165" y="2472238"/>
+                  </a:lnTo>
+                  <a:lnTo>
+                    <a:pt x="2363543" y="2488154"/>
+                  </a:lnTo>
+                  <a:lnTo>
+                    <a:pt x="2291920" y="2503701"/>
+                  </a:lnTo>
+                  <a:lnTo>
+                    <a:pt x="2220298" y="2518887"/>
+                  </a:lnTo>
+                  <a:lnTo>
+                    <a:pt x="2148675" y="2533719"/>
+                  </a:lnTo>
+                  <a:lnTo>
+                    <a:pt x="2077053" y="2548207"/>
+                  </a:lnTo>
+                  <a:lnTo>
+                    <a:pt x="2005430" y="2562359"/>
+                  </a:lnTo>
+                  <a:lnTo>
+                    <a:pt x="1933808" y="2576182"/>
+                  </a:lnTo>
+                  <a:lnTo>
+                    <a:pt x="1862185" y="2589684"/>
+                  </a:lnTo>
+                  <a:lnTo>
+                    <a:pt x="1790563" y="2602872"/>
+                  </a:lnTo>
+                  <a:lnTo>
+                    <a:pt x="1718940" y="2615753"/>
+                  </a:lnTo>
+                  <a:lnTo>
+                    <a:pt x="1647318" y="2628336"/>
+                  </a:lnTo>
+                  <a:lnTo>
+                    <a:pt x="1575695" y="2640626"/>
+                  </a:lnTo>
+                  <a:lnTo>
+                    <a:pt x="1504073" y="2652630"/>
+                  </a:lnTo>
+                  <a:lnTo>
+                    <a:pt x="1432450" y="2664356"/>
+                  </a:lnTo>
+                  <a:lnTo>
+                    <a:pt x="1360827" y="2675809"/>
+                  </a:lnTo>
+                  <a:lnTo>
+                    <a:pt x="1289205" y="2686996"/>
+                  </a:lnTo>
+                  <a:lnTo>
+                    <a:pt x="1217582" y="2697923"/>
+                  </a:lnTo>
+                  <a:lnTo>
+                    <a:pt x="1145960" y="2708597"/>
+                  </a:lnTo>
+                  <a:lnTo>
+                    <a:pt x="1074337" y="2719022"/>
+                  </a:lnTo>
+                  <a:lnTo>
+                    <a:pt x="1002715" y="2729205"/>
+                  </a:lnTo>
+                  <a:lnTo>
+                    <a:pt x="931092" y="2739152"/>
+                  </a:lnTo>
+                  <a:lnTo>
+                    <a:pt x="859470" y="2748867"/>
+                  </a:lnTo>
+                  <a:lnTo>
+                    <a:pt x="787847" y="2758357"/>
+                  </a:lnTo>
+                  <a:lnTo>
+                    <a:pt x="716225" y="2767627"/>
+                  </a:lnTo>
+                  <a:lnTo>
+                    <a:pt x="644602" y="2776681"/>
+                  </a:lnTo>
+                  <a:lnTo>
+                    <a:pt x="572980" y="2785524"/>
+                  </a:lnTo>
+                  <a:lnTo>
+                    <a:pt x="501357" y="2794162"/>
+                  </a:lnTo>
+                  <a:lnTo>
+                    <a:pt x="429735" y="2802600"/>
+                  </a:lnTo>
+                  <a:lnTo>
+                    <a:pt x="358112" y="2810841"/>
+                  </a:lnTo>
+                  <a:lnTo>
+                    <a:pt x="286490" y="2818892"/>
+                  </a:lnTo>
+                  <a:lnTo>
+                    <a:pt x="214867" y="2826755"/>
+                  </a:lnTo>
+                  <a:lnTo>
+                    <a:pt x="143245" y="2834435"/>
+                  </a:lnTo>
+                  <a:lnTo>
+                    <a:pt x="71622" y="2841937"/>
+                  </a:lnTo>
+                  <a:lnTo>
+                    <a:pt x="0" y="2849264"/>
                   </a:lnTo>
                   <a:close/>
                 </a:path>
@@ -3590,309 +3590,309 @@
           </p:nvSpPr>
           <p:spPr>
             <a:xfrm>
-              <a:off x="1172049" y="2424848"/>
-              <a:ext cx="7090630" cy="2248789"/>
+              <a:off x="1172049" y="2391862"/>
+              <a:ext cx="7090630" cy="2284828"/>
             </a:xfrm>
             <a:custGeom>
               <a:avLst/>
               <a:pathLst>
-                <a:path w="7090630" h="2248789">
+                <a:path w="7090630" h="2284828">
                   <a:moveTo>
-                    <a:pt x="0" y="875143"/>
+                    <a:pt x="0" y="861243"/>
                   </a:moveTo>
                   <a:lnTo>
-                    <a:pt x="71622" y="922437"/>
-                  </a:lnTo>
-                  <a:lnTo>
-                    <a:pt x="143245" y="968737"/>
-                  </a:lnTo>
-                  <a:lnTo>
-                    <a:pt x="214867" y="1014063"/>
-                  </a:lnTo>
-                  <a:lnTo>
-                    <a:pt x="286490" y="1058436"/>
-                  </a:lnTo>
-                  <a:lnTo>
-                    <a:pt x="358112" y="1101876"/>
-                  </a:lnTo>
-                  <a:lnTo>
-                    <a:pt x="429735" y="1144403"/>
-                  </a:lnTo>
-                  <a:lnTo>
-                    <a:pt x="501357" y="1186036"/>
-                  </a:lnTo>
-                  <a:lnTo>
-                    <a:pt x="572980" y="1226793"/>
-                  </a:lnTo>
-                  <a:lnTo>
-                    <a:pt x="644602" y="1266693"/>
-                  </a:lnTo>
-                  <a:lnTo>
-                    <a:pt x="716225" y="1305754"/>
-                  </a:lnTo>
-                  <a:lnTo>
-                    <a:pt x="787847" y="1343994"/>
-                  </a:lnTo>
-                  <a:lnTo>
-                    <a:pt x="859470" y="1381429"/>
-                  </a:lnTo>
-                  <a:lnTo>
-                    <a:pt x="931092" y="1418078"/>
-                  </a:lnTo>
-                  <a:lnTo>
-                    <a:pt x="1002715" y="1453956"/>
-                  </a:lnTo>
-                  <a:lnTo>
-                    <a:pt x="1074337" y="1489080"/>
-                  </a:lnTo>
-                  <a:lnTo>
-                    <a:pt x="1145960" y="1523465"/>
-                  </a:lnTo>
-                  <a:lnTo>
-                    <a:pt x="1217582" y="1557127"/>
-                  </a:lnTo>
-                  <a:lnTo>
-                    <a:pt x="1289205" y="1590081"/>
-                  </a:lnTo>
-                  <a:lnTo>
-                    <a:pt x="1360827" y="1622342"/>
-                  </a:lnTo>
-                  <a:lnTo>
-                    <a:pt x="1432450" y="1653925"/>
-                  </a:lnTo>
-                  <a:lnTo>
-                    <a:pt x="1504073" y="1684844"/>
-                  </a:lnTo>
-                  <a:lnTo>
-                    <a:pt x="1575695" y="1715112"/>
-                  </a:lnTo>
-                  <a:lnTo>
-                    <a:pt x="1647318" y="1744745"/>
-                  </a:lnTo>
-                  <a:lnTo>
-                    <a:pt x="1718940" y="1773754"/>
-                  </a:lnTo>
-                  <a:lnTo>
-                    <a:pt x="1790563" y="1802153"/>
-                  </a:lnTo>
-                  <a:lnTo>
-                    <a:pt x="1862185" y="1829955"/>
-                  </a:lnTo>
-                  <a:lnTo>
-                    <a:pt x="1933808" y="1857172"/>
-                  </a:lnTo>
-                  <a:lnTo>
-                    <a:pt x="2005430" y="1883817"/>
-                  </a:lnTo>
-                  <a:lnTo>
-                    <a:pt x="2077053" y="1909902"/>
-                  </a:lnTo>
-                  <a:lnTo>
-                    <a:pt x="2148675" y="1935439"/>
-                  </a:lnTo>
-                  <a:lnTo>
-                    <a:pt x="2220298" y="1960438"/>
-                  </a:lnTo>
-                  <a:lnTo>
-                    <a:pt x="2291920" y="1984912"/>
-                  </a:lnTo>
-                  <a:lnTo>
-                    <a:pt x="2363543" y="2008871"/>
-                  </a:lnTo>
-                  <a:lnTo>
-                    <a:pt x="2435165" y="2032326"/>
-                  </a:lnTo>
-                  <a:lnTo>
-                    <a:pt x="2506788" y="2055288"/>
-                  </a:lnTo>
-                  <a:lnTo>
-                    <a:pt x="2578410" y="2077768"/>
-                  </a:lnTo>
-                  <a:lnTo>
-                    <a:pt x="2650033" y="2099774"/>
-                  </a:lnTo>
-                  <a:lnTo>
-                    <a:pt x="2721655" y="2121318"/>
-                  </a:lnTo>
-                  <a:lnTo>
-                    <a:pt x="2793278" y="2142409"/>
-                  </a:lnTo>
-                  <a:lnTo>
-                    <a:pt x="2864901" y="2163057"/>
-                  </a:lnTo>
-                  <a:lnTo>
-                    <a:pt x="2936523" y="2183270"/>
-                  </a:lnTo>
-                  <a:lnTo>
-                    <a:pt x="3008146" y="2203058"/>
-                  </a:lnTo>
-                  <a:lnTo>
-                    <a:pt x="3079768" y="2222430"/>
-                  </a:lnTo>
-                  <a:lnTo>
-                    <a:pt x="3151391" y="2241395"/>
-                  </a:lnTo>
-                  <a:lnTo>
-                    <a:pt x="3223013" y="2248789"/>
-                  </a:lnTo>
-                  <a:lnTo>
-                    <a:pt x="3294636" y="2227918"/>
-                  </a:lnTo>
-                  <a:lnTo>
-                    <a:pt x="3366258" y="2206549"/>
-                  </a:lnTo>
-                  <a:lnTo>
-                    <a:pt x="3437881" y="2184671"/>
-                  </a:lnTo>
-                  <a:lnTo>
-                    <a:pt x="3509503" y="2162272"/>
-                  </a:lnTo>
-                  <a:lnTo>
-                    <a:pt x="3581126" y="2139338"/>
-                  </a:lnTo>
-                  <a:lnTo>
-                    <a:pt x="3652748" y="2115858"/>
-                  </a:lnTo>
-                  <a:lnTo>
-                    <a:pt x="3724371" y="2091818"/>
-                  </a:lnTo>
-                  <a:lnTo>
-                    <a:pt x="3795993" y="2067205"/>
-                  </a:lnTo>
-                  <a:lnTo>
-                    <a:pt x="3867616" y="2042006"/>
-                  </a:lnTo>
-                  <a:lnTo>
-                    <a:pt x="3939238" y="2016205"/>
-                  </a:lnTo>
-                  <a:lnTo>
-                    <a:pt x="4010861" y="1989790"/>
-                  </a:lnTo>
-                  <a:lnTo>
-                    <a:pt x="4082483" y="1962745"/>
-                  </a:lnTo>
-                  <a:lnTo>
-                    <a:pt x="4154106" y="1935055"/>
-                  </a:lnTo>
-                  <a:lnTo>
-                    <a:pt x="4225729" y="1906705"/>
-                  </a:lnTo>
-                  <a:lnTo>
-                    <a:pt x="4297351" y="1877680"/>
-                  </a:lnTo>
-                  <a:lnTo>
-                    <a:pt x="4368974" y="1847963"/>
-                  </a:lnTo>
-                  <a:lnTo>
-                    <a:pt x="4440596" y="1817537"/>
-                  </a:lnTo>
-                  <a:lnTo>
-                    <a:pt x="4512219" y="1786386"/>
-                  </a:lnTo>
-                  <a:lnTo>
-                    <a:pt x="4583841" y="1754492"/>
-                  </a:lnTo>
-                  <a:lnTo>
-                    <a:pt x="4655464" y="1721838"/>
-                  </a:lnTo>
-                  <a:lnTo>
-                    <a:pt x="4727086" y="1688406"/>
-                  </a:lnTo>
-                  <a:lnTo>
-                    <a:pt x="4798709" y="1654177"/>
-                  </a:lnTo>
-                  <a:lnTo>
-                    <a:pt x="4870331" y="1619132"/>
-                  </a:lnTo>
-                  <a:lnTo>
-                    <a:pt x="4941954" y="1583251"/>
-                  </a:lnTo>
-                  <a:lnTo>
-                    <a:pt x="5013576" y="1546515"/>
-                  </a:lnTo>
-                  <a:lnTo>
-                    <a:pt x="5085199" y="1508904"/>
-                  </a:lnTo>
-                  <a:lnTo>
-                    <a:pt x="5156821" y="1470396"/>
-                  </a:lnTo>
-                  <a:lnTo>
-                    <a:pt x="5228444" y="1430970"/>
-                  </a:lnTo>
-                  <a:lnTo>
-                    <a:pt x="5300066" y="1390604"/>
-                  </a:lnTo>
-                  <a:lnTo>
-                    <a:pt x="5371689" y="1349276"/>
-                  </a:lnTo>
-                  <a:lnTo>
-                    <a:pt x="5443311" y="1306963"/>
-                  </a:lnTo>
-                  <a:lnTo>
-                    <a:pt x="5514934" y="1263641"/>
-                  </a:lnTo>
-                  <a:lnTo>
-                    <a:pt x="5586557" y="1219287"/>
-                  </a:lnTo>
-                  <a:lnTo>
-                    <a:pt x="5658179" y="1173875"/>
-                  </a:lnTo>
-                  <a:lnTo>
-                    <a:pt x="5729802" y="1127381"/>
-                  </a:lnTo>
-                  <a:lnTo>
-                    <a:pt x="5801424" y="1079779"/>
-                  </a:lnTo>
-                  <a:lnTo>
-                    <a:pt x="5873047" y="1031041"/>
-                  </a:lnTo>
-                  <a:lnTo>
-                    <a:pt x="5944669" y="981142"/>
-                  </a:lnTo>
-                  <a:lnTo>
-                    <a:pt x="6016292" y="930054"/>
-                  </a:lnTo>
-                  <a:lnTo>
-                    <a:pt x="6087914" y="877748"/>
-                  </a:lnTo>
-                  <a:lnTo>
-                    <a:pt x="6159537" y="824195"/>
-                  </a:lnTo>
-                  <a:lnTo>
-                    <a:pt x="6231159" y="769365"/>
-                  </a:lnTo>
-                  <a:lnTo>
-                    <a:pt x="6302782" y="713228"/>
-                  </a:lnTo>
-                  <a:lnTo>
-                    <a:pt x="6374404" y="655754"/>
-                  </a:lnTo>
-                  <a:lnTo>
-                    <a:pt x="6446027" y="596909"/>
-                  </a:lnTo>
-                  <a:lnTo>
-                    <a:pt x="6517649" y="536661"/>
-                  </a:lnTo>
-                  <a:lnTo>
-                    <a:pt x="6589272" y="474978"/>
-                  </a:lnTo>
-                  <a:lnTo>
-                    <a:pt x="6660894" y="411824"/>
-                  </a:lnTo>
-                  <a:lnTo>
-                    <a:pt x="6732517" y="347164"/>
-                  </a:lnTo>
-                  <a:lnTo>
-                    <a:pt x="6804139" y="280964"/>
-                  </a:lnTo>
-                  <a:lnTo>
-                    <a:pt x="6875762" y="213185"/>
-                  </a:lnTo>
-                  <a:lnTo>
-                    <a:pt x="6947385" y="143790"/>
-                  </a:lnTo>
-                  <a:lnTo>
-                    <a:pt x="7019007" y="72742"/>
+                    <a:pt x="71622" y="911184"/>
+                  </a:lnTo>
+                  <a:lnTo>
+                    <a:pt x="143245" y="960039"/>
+                  </a:lnTo>
+                  <a:lnTo>
+                    <a:pt x="214867" y="1007832"/>
+                  </a:lnTo>
+                  <a:lnTo>
+                    <a:pt x="286490" y="1054585"/>
+                  </a:lnTo>
+                  <a:lnTo>
+                    <a:pt x="358112" y="1100321"/>
+                  </a:lnTo>
+                  <a:lnTo>
+                    <a:pt x="429735" y="1145063"/>
+                  </a:lnTo>
+                  <a:lnTo>
+                    <a:pt x="501357" y="1188831"/>
+                  </a:lnTo>
+                  <a:lnTo>
+                    <a:pt x="572980" y="1231647"/>
+                  </a:lnTo>
+                  <a:lnTo>
+                    <a:pt x="644602" y="1273532"/>
+                  </a:lnTo>
+                  <a:lnTo>
+                    <a:pt x="716225" y="1314506"/>
+                  </a:lnTo>
+                  <a:lnTo>
+                    <a:pt x="787847" y="1354589"/>
+                  </a:lnTo>
+                  <a:lnTo>
+                    <a:pt x="859470" y="1393800"/>
+                  </a:lnTo>
+                  <a:lnTo>
+                    <a:pt x="931092" y="1432158"/>
+                  </a:lnTo>
+                  <a:lnTo>
+                    <a:pt x="1002715" y="1469682"/>
+                  </a:lnTo>
+                  <a:lnTo>
+                    <a:pt x="1074337" y="1506389"/>
+                  </a:lnTo>
+                  <a:lnTo>
+                    <a:pt x="1145960" y="1542299"/>
+                  </a:lnTo>
+                  <a:lnTo>
+                    <a:pt x="1217582" y="1577427"/>
+                  </a:lnTo>
+                  <a:lnTo>
+                    <a:pt x="1289205" y="1611791"/>
+                  </a:lnTo>
+                  <a:lnTo>
+                    <a:pt x="1360827" y="1645408"/>
+                  </a:lnTo>
+                  <a:lnTo>
+                    <a:pt x="1432450" y="1678293"/>
+                  </a:lnTo>
+                  <a:lnTo>
+                    <a:pt x="1504073" y="1710463"/>
+                  </a:lnTo>
+                  <a:lnTo>
+                    <a:pt x="1575695" y="1741934"/>
+                  </a:lnTo>
+                  <a:lnTo>
+                    <a:pt x="1647318" y="1772720"/>
+                  </a:lnTo>
+                  <a:lnTo>
+                    <a:pt x="1718940" y="1802836"/>
+                  </a:lnTo>
+                  <a:lnTo>
+                    <a:pt x="1790563" y="1832297"/>
+                  </a:lnTo>
+                  <a:lnTo>
+                    <a:pt x="1862185" y="1861118"/>
+                  </a:lnTo>
+                  <a:lnTo>
+                    <a:pt x="1933808" y="1889312"/>
+                  </a:lnTo>
+                  <a:lnTo>
+                    <a:pt x="2005430" y="1916892"/>
+                  </a:lnTo>
+                  <a:lnTo>
+                    <a:pt x="2077053" y="1943873"/>
+                  </a:lnTo>
+                  <a:lnTo>
+                    <a:pt x="2148675" y="1970266"/>
+                  </a:lnTo>
+                  <a:lnTo>
+                    <a:pt x="2220298" y="1996086"/>
+                  </a:lnTo>
+                  <a:lnTo>
+                    <a:pt x="2291920" y="2021344"/>
+                  </a:lnTo>
+                  <a:lnTo>
+                    <a:pt x="2363543" y="2046052"/>
+                  </a:lnTo>
+                  <a:lnTo>
+                    <a:pt x="2435165" y="2070224"/>
+                  </a:lnTo>
+                  <a:lnTo>
+                    <a:pt x="2506788" y="2093869"/>
+                  </a:lnTo>
+                  <a:lnTo>
+                    <a:pt x="2578410" y="2117000"/>
+                  </a:lnTo>
+                  <a:lnTo>
+                    <a:pt x="2650033" y="2139628"/>
+                  </a:lnTo>
+                  <a:lnTo>
+                    <a:pt x="2721655" y="2161764"/>
+                  </a:lnTo>
+                  <a:lnTo>
+                    <a:pt x="2793278" y="2183419"/>
+                  </a:lnTo>
+                  <a:lnTo>
+                    <a:pt x="2864901" y="2204602"/>
+                  </a:lnTo>
+                  <a:lnTo>
+                    <a:pt x="2936523" y="2225325"/>
+                  </a:lnTo>
+                  <a:lnTo>
+                    <a:pt x="3008146" y="2245597"/>
+                  </a:lnTo>
+                  <a:lnTo>
+                    <a:pt x="3079768" y="2265428"/>
+                  </a:lnTo>
+                  <a:lnTo>
+                    <a:pt x="3151391" y="2284828"/>
+                  </a:lnTo>
+                  <a:lnTo>
+                    <a:pt x="3223013" y="2270079"/>
+                  </a:lnTo>
+                  <a:lnTo>
+                    <a:pt x="3294636" y="2248975"/>
+                  </a:lnTo>
+                  <a:lnTo>
+                    <a:pt x="3366258" y="2227370"/>
+                  </a:lnTo>
+                  <a:lnTo>
+                    <a:pt x="3437881" y="2205251"/>
+                  </a:lnTo>
+                  <a:lnTo>
+                    <a:pt x="3509503" y="2182605"/>
+                  </a:lnTo>
+                  <a:lnTo>
+                    <a:pt x="3581126" y="2159421"/>
+                  </a:lnTo>
+                  <a:lnTo>
+                    <a:pt x="3652748" y="2135686"/>
+                  </a:lnTo>
+                  <a:lnTo>
+                    <a:pt x="3724371" y="2111386"/>
+                  </a:lnTo>
+                  <a:lnTo>
+                    <a:pt x="3795993" y="2086508"/>
+                  </a:lnTo>
+                  <a:lnTo>
+                    <a:pt x="3867616" y="2061039"/>
+                  </a:lnTo>
+                  <a:lnTo>
+                    <a:pt x="3939238" y="2034963"/>
+                  </a:lnTo>
+                  <a:lnTo>
+                    <a:pt x="4010861" y="2008268"/>
+                  </a:lnTo>
+                  <a:lnTo>
+                    <a:pt x="4082483" y="1980937"/>
+                  </a:lnTo>
+                  <a:lnTo>
+                    <a:pt x="4154106" y="1952956"/>
+                  </a:lnTo>
+                  <a:lnTo>
+                    <a:pt x="4225729" y="1924310"/>
+                  </a:lnTo>
+                  <a:lnTo>
+                    <a:pt x="4297351" y="1894983"/>
+                  </a:lnTo>
+                  <a:lnTo>
+                    <a:pt x="4368974" y="1864958"/>
+                  </a:lnTo>
+                  <a:lnTo>
+                    <a:pt x="4440596" y="1834219"/>
+                  </a:lnTo>
+                  <a:lnTo>
+                    <a:pt x="4512219" y="1802748"/>
+                  </a:lnTo>
+                  <a:lnTo>
+                    <a:pt x="4583841" y="1770530"/>
+                  </a:lnTo>
+                  <a:lnTo>
+                    <a:pt x="4655464" y="1737545"/>
+                  </a:lnTo>
+                  <a:lnTo>
+                    <a:pt x="4727086" y="1703775"/>
+                  </a:lnTo>
+                  <a:lnTo>
+                    <a:pt x="4798709" y="1669202"/>
+                  </a:lnTo>
+                  <a:lnTo>
+                    <a:pt x="4870331" y="1633807"/>
+                  </a:lnTo>
+                  <a:lnTo>
+                    <a:pt x="4941954" y="1597570"/>
+                  </a:lnTo>
+                  <a:lnTo>
+                    <a:pt x="5013576" y="1560471"/>
+                  </a:lnTo>
+                  <a:lnTo>
+                    <a:pt x="5085199" y="1522490"/>
+                  </a:lnTo>
+                  <a:lnTo>
+                    <a:pt x="5156821" y="1483605"/>
+                  </a:lnTo>
+                  <a:lnTo>
+                    <a:pt x="5228444" y="1443796"/>
+                  </a:lnTo>
+                  <a:lnTo>
+                    <a:pt x="5300066" y="1403039"/>
+                  </a:lnTo>
+                  <a:lnTo>
+                    <a:pt x="5371689" y="1361313"/>
+                  </a:lnTo>
+                  <a:lnTo>
+                    <a:pt x="5443311" y="1318595"/>
+                  </a:lnTo>
+                  <a:lnTo>
+                    <a:pt x="5514934" y="1274861"/>
+                  </a:lnTo>
+                  <a:lnTo>
+                    <a:pt x="5586557" y="1230086"/>
+                  </a:lnTo>
+                  <a:lnTo>
+                    <a:pt x="5658179" y="1184247"/>
+                  </a:lnTo>
+                  <a:lnTo>
+                    <a:pt x="5729802" y="1137317"/>
+                  </a:lnTo>
+                  <a:lnTo>
+                    <a:pt x="5801424" y="1089271"/>
+                  </a:lnTo>
+                  <a:lnTo>
+                    <a:pt x="5873047" y="1040083"/>
+                  </a:lnTo>
+                  <a:lnTo>
+                    <a:pt x="5944669" y="989724"/>
+                  </a:lnTo>
+                  <a:lnTo>
+                    <a:pt x="6016292" y="938168"/>
+                  </a:lnTo>
+                  <a:lnTo>
+                    <a:pt x="6087914" y="885385"/>
+                  </a:lnTo>
+                  <a:lnTo>
+                    <a:pt x="6159537" y="831347"/>
+                  </a:lnTo>
+                  <a:lnTo>
+                    <a:pt x="6231159" y="776023"/>
+                  </a:lnTo>
+                  <a:lnTo>
+                    <a:pt x="6302782" y="719384"/>
+                  </a:lnTo>
+                  <a:lnTo>
+                    <a:pt x="6374404" y="661398"/>
+                  </a:lnTo>
+                  <a:lnTo>
+                    <a:pt x="6446027" y="602032"/>
+                  </a:lnTo>
+                  <a:lnTo>
+                    <a:pt x="6517649" y="541255"/>
+                  </a:lnTo>
+                  <a:lnTo>
+                    <a:pt x="6589272" y="479032"/>
+                  </a:lnTo>
+                  <a:lnTo>
+                    <a:pt x="6660894" y="415328"/>
+                  </a:lnTo>
+                  <a:lnTo>
+                    <a:pt x="6732517" y="350110"/>
+                  </a:lnTo>
+                  <a:lnTo>
+                    <a:pt x="6804139" y="283341"/>
+                  </a:lnTo>
+                  <a:lnTo>
+                    <a:pt x="6875762" y="214983"/>
+                  </a:lnTo>
+                  <a:lnTo>
+                    <a:pt x="6947385" y="145000"/>
+                  </a:lnTo>
+                  <a:lnTo>
+                    <a:pt x="7019007" y="73352"/>
                   </a:lnTo>
                   <a:lnTo>
                     <a:pt x="7090630" y="0"/>
@@ -3915,312 +3915,312 @@
           </p:nvSpPr>
           <p:spPr>
             <a:xfrm>
-              <a:off x="1172049" y="4684810"/>
-              <a:ext cx="7090630" cy="590029"/>
+              <a:off x="1172049" y="4682555"/>
+              <a:ext cx="7090630" cy="606335"/>
             </a:xfrm>
             <a:custGeom>
               <a:avLst/>
               <a:pathLst>
-                <a:path w="7090630" h="590029">
+                <a:path w="7090630" h="606335">
                   <a:moveTo>
-                    <a:pt x="7090630" y="590029"/>
+                    <a:pt x="7090630" y="606335"/>
                   </a:moveTo>
                   <a:lnTo>
-                    <a:pt x="7019007" y="584136"/>
-                  </a:lnTo>
-                  <a:lnTo>
-                    <a:pt x="6947385" y="578117"/>
-                  </a:lnTo>
-                  <a:lnTo>
-                    <a:pt x="6875762" y="571968"/>
-                  </a:lnTo>
-                  <a:lnTo>
-                    <a:pt x="6804139" y="565687"/>
-                  </a:lnTo>
-                  <a:lnTo>
-                    <a:pt x="6732517" y="559271"/>
-                  </a:lnTo>
-                  <a:lnTo>
-                    <a:pt x="6660894" y="552717"/>
-                  </a:lnTo>
-                  <a:lnTo>
-                    <a:pt x="6589272" y="546023"/>
-                  </a:lnTo>
-                  <a:lnTo>
-                    <a:pt x="6517649" y="539185"/>
-                  </a:lnTo>
-                  <a:lnTo>
-                    <a:pt x="6446027" y="532200"/>
-                  </a:lnTo>
-                  <a:lnTo>
-                    <a:pt x="6374404" y="525064"/>
-                  </a:lnTo>
-                  <a:lnTo>
-                    <a:pt x="6302782" y="517776"/>
-                  </a:lnTo>
-                  <a:lnTo>
-                    <a:pt x="6231159" y="510331"/>
-                  </a:lnTo>
-                  <a:lnTo>
-                    <a:pt x="6159537" y="502726"/>
-                  </a:lnTo>
-                  <a:lnTo>
-                    <a:pt x="6087914" y="494958"/>
-                  </a:lnTo>
-                  <a:lnTo>
-                    <a:pt x="6016292" y="487023"/>
-                  </a:lnTo>
-                  <a:lnTo>
-                    <a:pt x="5944669" y="478918"/>
-                  </a:lnTo>
-                  <a:lnTo>
-                    <a:pt x="5873047" y="470638"/>
-                  </a:lnTo>
-                  <a:lnTo>
-                    <a:pt x="5801424" y="462181"/>
-                  </a:lnTo>
-                  <a:lnTo>
-                    <a:pt x="5729802" y="453542"/>
-                  </a:lnTo>
-                  <a:lnTo>
-                    <a:pt x="5658179" y="444717"/>
-                  </a:lnTo>
-                  <a:lnTo>
-                    <a:pt x="5586557" y="435703"/>
-                  </a:lnTo>
-                  <a:lnTo>
-                    <a:pt x="5514934" y="426495"/>
-                  </a:lnTo>
-                  <a:lnTo>
-                    <a:pt x="5443311" y="417090"/>
-                  </a:lnTo>
-                  <a:lnTo>
-                    <a:pt x="5371689" y="407482"/>
-                  </a:lnTo>
-                  <a:lnTo>
-                    <a:pt x="5300066" y="397668"/>
-                  </a:lnTo>
-                  <a:lnTo>
-                    <a:pt x="5228444" y="387644"/>
-                  </a:lnTo>
-                  <a:lnTo>
-                    <a:pt x="5156821" y="377404"/>
-                  </a:lnTo>
-                  <a:lnTo>
-                    <a:pt x="5085199" y="366944"/>
-                  </a:lnTo>
-                  <a:lnTo>
-                    <a:pt x="5013576" y="356259"/>
-                  </a:lnTo>
-                  <a:lnTo>
-                    <a:pt x="4941954" y="345345"/>
-                  </a:lnTo>
-                  <a:lnTo>
-                    <a:pt x="4870331" y="334196"/>
-                  </a:lnTo>
-                  <a:lnTo>
-                    <a:pt x="4798709" y="322808"/>
-                  </a:lnTo>
-                  <a:lnTo>
-                    <a:pt x="4727086" y="311176"/>
-                  </a:lnTo>
-                  <a:lnTo>
-                    <a:pt x="4655464" y="299294"/>
-                  </a:lnTo>
-                  <a:lnTo>
-                    <a:pt x="4583841" y="287156"/>
-                  </a:lnTo>
-                  <a:lnTo>
-                    <a:pt x="4512219" y="274758"/>
-                  </a:lnTo>
-                  <a:lnTo>
-                    <a:pt x="4440596" y="262093"/>
-                  </a:lnTo>
-                  <a:lnTo>
-                    <a:pt x="4368974" y="249156"/>
-                  </a:lnTo>
-                  <a:lnTo>
-                    <a:pt x="4297351" y="235942"/>
-                  </a:lnTo>
-                  <a:lnTo>
-                    <a:pt x="4225729" y="222443"/>
-                  </a:lnTo>
-                  <a:lnTo>
-                    <a:pt x="4154106" y="208655"/>
-                  </a:lnTo>
-                  <a:lnTo>
-                    <a:pt x="4082483" y="194571"/>
-                  </a:lnTo>
-                  <a:lnTo>
-                    <a:pt x="4010861" y="180184"/>
-                  </a:lnTo>
-                  <a:lnTo>
-                    <a:pt x="3939238" y="165488"/>
-                  </a:lnTo>
-                  <a:lnTo>
-                    <a:pt x="3867616" y="150476"/>
-                  </a:lnTo>
-                  <a:lnTo>
-                    <a:pt x="3795993" y="135142"/>
-                  </a:lnTo>
-                  <a:lnTo>
-                    <a:pt x="3724371" y="119479"/>
-                  </a:lnTo>
-                  <a:lnTo>
-                    <a:pt x="3652748" y="103479"/>
-                  </a:lnTo>
-                  <a:lnTo>
-                    <a:pt x="3581126" y="87136"/>
-                  </a:lnTo>
-                  <a:lnTo>
-                    <a:pt x="3509503" y="70441"/>
-                  </a:lnTo>
-                  <a:lnTo>
-                    <a:pt x="3437881" y="53388"/>
-                  </a:lnTo>
-                  <a:lnTo>
-                    <a:pt x="3366258" y="35969"/>
-                  </a:lnTo>
-                  <a:lnTo>
-                    <a:pt x="3294636" y="18175"/>
-                  </a:lnTo>
-                  <a:lnTo>
-                    <a:pt x="3223013" y="0"/>
-                  </a:lnTo>
-                  <a:lnTo>
-                    <a:pt x="3151391" y="9213"/>
-                  </a:lnTo>
-                  <a:lnTo>
-                    <a:pt x="3079768" y="29123"/>
-                  </a:lnTo>
-                  <a:lnTo>
-                    <a:pt x="3008146" y="48570"/>
-                  </a:lnTo>
-                  <a:lnTo>
-                    <a:pt x="2936523" y="67565"/>
-                  </a:lnTo>
-                  <a:lnTo>
-                    <a:pt x="2864901" y="86117"/>
-                  </a:lnTo>
-                  <a:lnTo>
-                    <a:pt x="2793278" y="104237"/>
-                  </a:lnTo>
-                  <a:lnTo>
-                    <a:pt x="2721655" y="121935"/>
-                  </a:lnTo>
-                  <a:lnTo>
-                    <a:pt x="2650033" y="139221"/>
-                  </a:lnTo>
-                  <a:lnTo>
-                    <a:pt x="2578410" y="156105"/>
-                  </a:lnTo>
-                  <a:lnTo>
-                    <a:pt x="2506788" y="172596"/>
-                  </a:lnTo>
-                  <a:lnTo>
-                    <a:pt x="2435165" y="188702"/>
-                  </a:lnTo>
-                  <a:lnTo>
-                    <a:pt x="2363543" y="204434"/>
-                  </a:lnTo>
-                  <a:lnTo>
-                    <a:pt x="2291920" y="219799"/>
-                  </a:lnTo>
-                  <a:lnTo>
-                    <a:pt x="2220298" y="234807"/>
-                  </a:lnTo>
-                  <a:lnTo>
-                    <a:pt x="2148675" y="249465"/>
-                  </a:lnTo>
-                  <a:lnTo>
-                    <a:pt x="2077053" y="263782"/>
-                  </a:lnTo>
-                  <a:lnTo>
-                    <a:pt x="2005430" y="277766"/>
-                  </a:lnTo>
-                  <a:lnTo>
-                    <a:pt x="1933808" y="291424"/>
-                  </a:lnTo>
-                  <a:lnTo>
-                    <a:pt x="1862185" y="304764"/>
-                  </a:lnTo>
-                  <a:lnTo>
-                    <a:pt x="1790563" y="317794"/>
-                  </a:lnTo>
-                  <a:lnTo>
-                    <a:pt x="1718940" y="330520"/>
-                  </a:lnTo>
-                  <a:lnTo>
-                    <a:pt x="1647318" y="342950"/>
-                  </a:lnTo>
-                  <a:lnTo>
-                    <a:pt x="1575695" y="355090"/>
-                  </a:lnTo>
-                  <a:lnTo>
-                    <a:pt x="1504073" y="366948"/>
-                  </a:lnTo>
-                  <a:lnTo>
-                    <a:pt x="1432450" y="378530"/>
-                  </a:lnTo>
-                  <a:lnTo>
-                    <a:pt x="1360827" y="389842"/>
-                  </a:lnTo>
-                  <a:lnTo>
-                    <a:pt x="1289205" y="400891"/>
-                  </a:lnTo>
-                  <a:lnTo>
-                    <a:pt x="1217582" y="411682"/>
-                  </a:lnTo>
-                  <a:lnTo>
-                    <a:pt x="1145960" y="422222"/>
-                  </a:lnTo>
-                  <a:lnTo>
-                    <a:pt x="1074337" y="432517"/>
-                  </a:lnTo>
-                  <a:lnTo>
-                    <a:pt x="1002715" y="442572"/>
-                  </a:lnTo>
-                  <a:lnTo>
-                    <a:pt x="931092" y="452393"/>
-                  </a:lnTo>
-                  <a:lnTo>
-                    <a:pt x="859470" y="461986"/>
-                  </a:lnTo>
-                  <a:lnTo>
-                    <a:pt x="787847" y="471355"/>
-                  </a:lnTo>
-                  <a:lnTo>
-                    <a:pt x="716225" y="480506"/>
-                  </a:lnTo>
-                  <a:lnTo>
-                    <a:pt x="644602" y="489443"/>
-                  </a:lnTo>
-                  <a:lnTo>
-                    <a:pt x="572980" y="498173"/>
-                  </a:lnTo>
-                  <a:lnTo>
-                    <a:pt x="501357" y="506700"/>
-                  </a:lnTo>
-                  <a:lnTo>
-                    <a:pt x="429735" y="515028"/>
-                  </a:lnTo>
-                  <a:lnTo>
-                    <a:pt x="358112" y="523162"/>
-                  </a:lnTo>
-                  <a:lnTo>
-                    <a:pt x="286490" y="531106"/>
-                  </a:lnTo>
-                  <a:lnTo>
-                    <a:pt x="214867" y="538866"/>
-                  </a:lnTo>
-                  <a:lnTo>
-                    <a:pt x="143245" y="546445"/>
-                  </a:lnTo>
-                  <a:lnTo>
-                    <a:pt x="71622" y="553848"/>
-                  </a:lnTo>
-                  <a:lnTo>
-                    <a:pt x="0" y="561078"/>
+                    <a:pt x="7019007" y="600547"/>
+                  </a:lnTo>
+                  <a:lnTo>
+                    <a:pt x="6947385" y="594630"/>
+                  </a:lnTo>
+                  <a:lnTo>
+                    <a:pt x="6875762" y="588582"/>
+                  </a:lnTo>
+                  <a:lnTo>
+                    <a:pt x="6804139" y="582400"/>
+                  </a:lnTo>
+                  <a:lnTo>
+                    <a:pt x="6732517" y="576080"/>
+                  </a:lnTo>
+                  <a:lnTo>
+                    <a:pt x="6660894" y="569619"/>
+                  </a:lnTo>
+                  <a:lnTo>
+                    <a:pt x="6589272" y="563015"/>
+                  </a:lnTo>
+                  <a:lnTo>
+                    <a:pt x="6517649" y="556264"/>
+                  </a:lnTo>
+                  <a:lnTo>
+                    <a:pt x="6446027" y="549362"/>
+                  </a:lnTo>
+                  <a:lnTo>
+                    <a:pt x="6374404" y="542308"/>
+                  </a:lnTo>
+                  <a:lnTo>
+                    <a:pt x="6302782" y="535096"/>
+                  </a:lnTo>
+                  <a:lnTo>
+                    <a:pt x="6231159" y="527724"/>
+                  </a:lnTo>
+                  <a:lnTo>
+                    <a:pt x="6159537" y="520188"/>
+                  </a:lnTo>
+                  <a:lnTo>
+                    <a:pt x="6087914" y="512485"/>
+                  </a:lnTo>
+                  <a:lnTo>
+                    <a:pt x="6016292" y="504611"/>
+                  </a:lnTo>
+                  <a:lnTo>
+                    <a:pt x="5944669" y="496561"/>
+                  </a:lnTo>
+                  <a:lnTo>
+                    <a:pt x="5873047" y="488332"/>
+                  </a:lnTo>
+                  <a:lnTo>
+                    <a:pt x="5801424" y="479921"/>
+                  </a:lnTo>
+                  <a:lnTo>
+                    <a:pt x="5729802" y="471322"/>
+                  </a:lnTo>
+                  <a:lnTo>
+                    <a:pt x="5658179" y="462532"/>
+                  </a:lnTo>
+                  <a:lnTo>
+                    <a:pt x="5586557" y="453547"/>
+                  </a:lnTo>
+                  <a:lnTo>
+                    <a:pt x="5514934" y="444362"/>
+                  </a:lnTo>
+                  <a:lnTo>
+                    <a:pt x="5443311" y="434973"/>
+                  </a:lnTo>
+                  <a:lnTo>
+                    <a:pt x="5371689" y="425375"/>
+                  </a:lnTo>
+                  <a:lnTo>
+                    <a:pt x="5300066" y="415563"/>
+                  </a:lnTo>
+                  <a:lnTo>
+                    <a:pt x="5228444" y="405534"/>
+                  </a:lnTo>
+                  <a:lnTo>
+                    <a:pt x="5156821" y="395281"/>
+                  </a:lnTo>
+                  <a:lnTo>
+                    <a:pt x="5085199" y="384800"/>
+                  </a:lnTo>
+                  <a:lnTo>
+                    <a:pt x="5013576" y="374087"/>
+                  </a:lnTo>
+                  <a:lnTo>
+                    <a:pt x="4941954" y="363135"/>
+                  </a:lnTo>
+                  <a:lnTo>
+                    <a:pt x="4870331" y="351940"/>
+                  </a:lnTo>
+                  <a:lnTo>
+                    <a:pt x="4798709" y="340496"/>
+                  </a:lnTo>
+                  <a:lnTo>
+                    <a:pt x="4727086" y="328797"/>
+                  </a:lnTo>
+                  <a:lnTo>
+                    <a:pt x="4655464" y="316838"/>
+                  </a:lnTo>
+                  <a:lnTo>
+                    <a:pt x="4583841" y="304614"/>
+                  </a:lnTo>
+                  <a:lnTo>
+                    <a:pt x="4512219" y="292117"/>
+                  </a:lnTo>
+                  <a:lnTo>
+                    <a:pt x="4440596" y="279343"/>
+                  </a:lnTo>
+                  <a:lnTo>
+                    <a:pt x="4368974" y="266284"/>
+                  </a:lnTo>
+                  <a:lnTo>
+                    <a:pt x="4297351" y="252936"/>
+                  </a:lnTo>
+                  <a:lnTo>
+                    <a:pt x="4225729" y="239290"/>
+                  </a:lnTo>
+                  <a:lnTo>
+                    <a:pt x="4154106" y="225341"/>
+                  </a:lnTo>
+                  <a:lnTo>
+                    <a:pt x="4082483" y="211082"/>
+                  </a:lnTo>
+                  <a:lnTo>
+                    <a:pt x="4010861" y="196506"/>
+                  </a:lnTo>
+                  <a:lnTo>
+                    <a:pt x="3939238" y="181606"/>
+                  </a:lnTo>
+                  <a:lnTo>
+                    <a:pt x="3867616" y="166375"/>
+                  </a:lnTo>
+                  <a:lnTo>
+                    <a:pt x="3795993" y="150805"/>
+                  </a:lnTo>
+                  <a:lnTo>
+                    <a:pt x="3724371" y="134889"/>
+                  </a:lnTo>
+                  <a:lnTo>
+                    <a:pt x="3652748" y="118618"/>
+                  </a:lnTo>
+                  <a:lnTo>
+                    <a:pt x="3581126" y="101986"/>
+                  </a:lnTo>
+                  <a:lnTo>
+                    <a:pt x="3509503" y="84985"/>
+                  </a:lnTo>
+                  <a:lnTo>
+                    <a:pt x="3437881" y="67605"/>
+                  </a:lnTo>
+                  <a:lnTo>
+                    <a:pt x="3366258" y="49839"/>
+                  </a:lnTo>
+                  <a:lnTo>
+                    <a:pt x="3294636" y="31678"/>
+                  </a:lnTo>
+                  <a:lnTo>
+                    <a:pt x="3223013" y="13113"/>
+                  </a:lnTo>
+                  <a:lnTo>
+                    <a:pt x="3151391" y="0"/>
+                  </a:lnTo>
+                  <a:lnTo>
+                    <a:pt x="3079768" y="20134"/>
+                  </a:lnTo>
+                  <a:lnTo>
+                    <a:pt x="3008146" y="39800"/>
+                  </a:lnTo>
+                  <a:lnTo>
+                    <a:pt x="2936523" y="59010"/>
+                  </a:lnTo>
+                  <a:lnTo>
+                    <a:pt x="2864901" y="77773"/>
+                  </a:lnTo>
+                  <a:lnTo>
+                    <a:pt x="2793278" y="96101"/>
+                  </a:lnTo>
+                  <a:lnTo>
+                    <a:pt x="2721655" y="114002"/>
+                  </a:lnTo>
+                  <a:lnTo>
+                    <a:pt x="2650033" y="131488"/>
+                  </a:lnTo>
+                  <a:lnTo>
+                    <a:pt x="2578410" y="148567"/>
+                  </a:lnTo>
+                  <a:lnTo>
+                    <a:pt x="2506788" y="165250"/>
+                  </a:lnTo>
+                  <a:lnTo>
+                    <a:pt x="2435165" y="181545"/>
+                  </a:lnTo>
+                  <a:lnTo>
+                    <a:pt x="2363543" y="197462"/>
+                  </a:lnTo>
+                  <a:lnTo>
+                    <a:pt x="2291920" y="213009"/>
+                  </a:lnTo>
+                  <a:lnTo>
+                    <a:pt x="2220298" y="228194"/>
+                  </a:lnTo>
+                  <a:lnTo>
+                    <a:pt x="2148675" y="243027"/>
+                  </a:lnTo>
+                  <a:lnTo>
+                    <a:pt x="2077053" y="257515"/>
+                  </a:lnTo>
+                  <a:lnTo>
+                    <a:pt x="2005430" y="271667"/>
+                  </a:lnTo>
+                  <a:lnTo>
+                    <a:pt x="1933808" y="285489"/>
+                  </a:lnTo>
+                  <a:lnTo>
+                    <a:pt x="1862185" y="298991"/>
+                  </a:lnTo>
+                  <a:lnTo>
+                    <a:pt x="1790563" y="312179"/>
+                  </a:lnTo>
+                  <a:lnTo>
+                    <a:pt x="1718940" y="325061"/>
+                  </a:lnTo>
+                  <a:lnTo>
+                    <a:pt x="1647318" y="337643"/>
+                  </a:lnTo>
+                  <a:lnTo>
+                    <a:pt x="1575695" y="349933"/>
+                  </a:lnTo>
+                  <a:lnTo>
+                    <a:pt x="1504073" y="361938"/>
+                  </a:lnTo>
+                  <a:lnTo>
+                    <a:pt x="1432450" y="373663"/>
+                  </a:lnTo>
+                  <a:lnTo>
+                    <a:pt x="1360827" y="385117"/>
+                  </a:lnTo>
+                  <a:lnTo>
+                    <a:pt x="1289205" y="396304"/>
+                  </a:lnTo>
+                  <a:lnTo>
+                    <a:pt x="1217582" y="407231"/>
+                  </a:lnTo>
+                  <a:lnTo>
+                    <a:pt x="1145960" y="417904"/>
+                  </a:lnTo>
+                  <a:lnTo>
+                    <a:pt x="1074337" y="428330"/>
+                  </a:lnTo>
+                  <a:lnTo>
+                    <a:pt x="1002715" y="438513"/>
+                  </a:lnTo>
+                  <a:lnTo>
+                    <a:pt x="931092" y="448460"/>
+                  </a:lnTo>
+                  <a:lnTo>
+                    <a:pt x="859470" y="458175"/>
+                  </a:lnTo>
+                  <a:lnTo>
+                    <a:pt x="787847" y="467665"/>
+                  </a:lnTo>
+                  <a:lnTo>
+                    <a:pt x="716225" y="476934"/>
+                  </a:lnTo>
+                  <a:lnTo>
+                    <a:pt x="644602" y="485988"/>
+                  </a:lnTo>
+                  <a:lnTo>
+                    <a:pt x="572980" y="494832"/>
+                  </a:lnTo>
+                  <a:lnTo>
+                    <a:pt x="501357" y="503470"/>
+                  </a:lnTo>
+                  <a:lnTo>
+                    <a:pt x="429735" y="511908"/>
+                  </a:lnTo>
+                  <a:lnTo>
+                    <a:pt x="358112" y="520149"/>
+                  </a:lnTo>
+                  <a:lnTo>
+                    <a:pt x="286490" y="528199"/>
+                  </a:lnTo>
+                  <a:lnTo>
+                    <a:pt x="214867" y="536062"/>
+                  </a:lnTo>
+                  <a:lnTo>
+                    <a:pt x="143245" y="543742"/>
+                  </a:lnTo>
+                  <a:lnTo>
+                    <a:pt x="71622" y="551244"/>
+                  </a:lnTo>
+                  <a:lnTo>
+                    <a:pt x="0" y="558572"/>
                   </a:lnTo>
                 </a:path>
               </a:pathLst>
@@ -4240,309 +4240,309 @@
           </p:nvSpPr>
           <p:spPr>
             <a:xfrm>
-              <a:off x="1172049" y="4623345"/>
-              <a:ext cx="7090630" cy="99891"/>
+              <a:off x="1172049" y="4642615"/>
+              <a:ext cx="7090630" cy="65531"/>
             </a:xfrm>
             <a:custGeom>
               <a:avLst/>
               <a:pathLst>
-                <a:path w="7090630" h="99891">
+                <a:path w="7090630" h="65531">
                   <a:moveTo>
-                    <a:pt x="0" y="99891"/>
+                    <a:pt x="0" y="65531"/>
                   </a:moveTo>
                   <a:lnTo>
-                    <a:pt x="71622" y="98938"/>
-                  </a:lnTo>
-                  <a:lnTo>
-                    <a:pt x="143245" y="97984"/>
-                  </a:lnTo>
-                  <a:lnTo>
-                    <a:pt x="214867" y="97028"/>
-                  </a:lnTo>
-                  <a:lnTo>
-                    <a:pt x="286490" y="96072"/>
-                  </a:lnTo>
-                  <a:lnTo>
-                    <a:pt x="358112" y="95115"/>
-                  </a:lnTo>
-                  <a:lnTo>
-                    <a:pt x="429735" y="94156"/>
-                  </a:lnTo>
-                  <a:lnTo>
-                    <a:pt x="501357" y="93196"/>
-                  </a:lnTo>
-                  <a:lnTo>
-                    <a:pt x="572980" y="92236"/>
-                  </a:lnTo>
-                  <a:lnTo>
-                    <a:pt x="644602" y="91274"/>
-                  </a:lnTo>
-                  <a:lnTo>
-                    <a:pt x="716225" y="90311"/>
-                  </a:lnTo>
-                  <a:lnTo>
-                    <a:pt x="787847" y="89347"/>
-                  </a:lnTo>
-                  <a:lnTo>
-                    <a:pt x="859470" y="88381"/>
-                  </a:lnTo>
-                  <a:lnTo>
-                    <a:pt x="931092" y="87415"/>
-                  </a:lnTo>
-                  <a:lnTo>
-                    <a:pt x="1002715" y="86448"/>
-                  </a:lnTo>
-                  <a:lnTo>
-                    <a:pt x="1074337" y="85479"/>
-                  </a:lnTo>
-                  <a:lnTo>
-                    <a:pt x="1145960" y="84509"/>
-                  </a:lnTo>
-                  <a:lnTo>
-                    <a:pt x="1217582" y="83539"/>
-                  </a:lnTo>
-                  <a:lnTo>
-                    <a:pt x="1289205" y="82567"/>
-                  </a:lnTo>
-                  <a:lnTo>
-                    <a:pt x="1360827" y="81594"/>
-                  </a:lnTo>
-                  <a:lnTo>
-                    <a:pt x="1432450" y="80619"/>
-                  </a:lnTo>
-                  <a:lnTo>
-                    <a:pt x="1504073" y="79644"/>
-                  </a:lnTo>
-                  <a:lnTo>
-                    <a:pt x="1575695" y="78668"/>
-                  </a:lnTo>
-                  <a:lnTo>
-                    <a:pt x="1647318" y="77690"/>
-                  </a:lnTo>
-                  <a:lnTo>
-                    <a:pt x="1718940" y="76711"/>
-                  </a:lnTo>
-                  <a:lnTo>
-                    <a:pt x="1790563" y="75732"/>
-                  </a:lnTo>
-                  <a:lnTo>
-                    <a:pt x="1862185" y="74751"/>
-                  </a:lnTo>
-                  <a:lnTo>
-                    <a:pt x="1933808" y="73769"/>
-                  </a:lnTo>
-                  <a:lnTo>
-                    <a:pt x="2005430" y="72786"/>
-                  </a:lnTo>
-                  <a:lnTo>
-                    <a:pt x="2077053" y="71801"/>
-                  </a:lnTo>
-                  <a:lnTo>
-                    <a:pt x="2148675" y="70816"/>
-                  </a:lnTo>
-                  <a:lnTo>
-                    <a:pt x="2220298" y="69829"/>
-                  </a:lnTo>
-                  <a:lnTo>
-                    <a:pt x="2291920" y="68841"/>
-                  </a:lnTo>
-                  <a:lnTo>
-                    <a:pt x="2363543" y="67853"/>
-                  </a:lnTo>
-                  <a:lnTo>
-                    <a:pt x="2435165" y="66862"/>
-                  </a:lnTo>
-                  <a:lnTo>
-                    <a:pt x="2506788" y="65871"/>
-                  </a:lnTo>
-                  <a:lnTo>
-                    <a:pt x="2578410" y="64879"/>
-                  </a:lnTo>
-                  <a:lnTo>
-                    <a:pt x="2650033" y="63886"/>
-                  </a:lnTo>
-                  <a:lnTo>
-                    <a:pt x="2721655" y="62891"/>
-                  </a:lnTo>
-                  <a:lnTo>
-                    <a:pt x="2793278" y="61895"/>
-                  </a:lnTo>
-                  <a:lnTo>
-                    <a:pt x="2864901" y="60898"/>
-                  </a:lnTo>
-                  <a:lnTo>
-                    <a:pt x="2936523" y="59900"/>
-                  </a:lnTo>
-                  <a:lnTo>
-                    <a:pt x="3008146" y="58901"/>
-                  </a:lnTo>
-                  <a:lnTo>
-                    <a:pt x="3079768" y="57901"/>
-                  </a:lnTo>
-                  <a:lnTo>
-                    <a:pt x="3151391" y="56899"/>
-                  </a:lnTo>
-                  <a:lnTo>
-                    <a:pt x="3223013" y="55897"/>
-                  </a:lnTo>
-                  <a:lnTo>
-                    <a:pt x="3294636" y="54893"/>
-                  </a:lnTo>
-                  <a:lnTo>
-                    <a:pt x="3366258" y="53888"/>
-                  </a:lnTo>
-                  <a:lnTo>
-                    <a:pt x="3437881" y="52882"/>
-                  </a:lnTo>
-                  <a:lnTo>
-                    <a:pt x="3509503" y="51874"/>
-                  </a:lnTo>
-                  <a:lnTo>
-                    <a:pt x="3581126" y="50866"/>
-                  </a:lnTo>
-                  <a:lnTo>
-                    <a:pt x="3652748" y="49856"/>
-                  </a:lnTo>
-                  <a:lnTo>
-                    <a:pt x="3724371" y="48846"/>
-                  </a:lnTo>
-                  <a:lnTo>
-                    <a:pt x="3795993" y="47834"/>
-                  </a:lnTo>
-                  <a:lnTo>
-                    <a:pt x="3867616" y="46820"/>
-                  </a:lnTo>
-                  <a:lnTo>
-                    <a:pt x="3939238" y="45806"/>
-                  </a:lnTo>
-                  <a:lnTo>
-                    <a:pt x="4010861" y="44791"/>
-                  </a:lnTo>
-                  <a:lnTo>
-                    <a:pt x="4082483" y="43774"/>
-                  </a:lnTo>
-                  <a:lnTo>
-                    <a:pt x="4154106" y="42756"/>
-                  </a:lnTo>
-                  <a:lnTo>
-                    <a:pt x="4225729" y="41737"/>
-                  </a:lnTo>
-                  <a:lnTo>
-                    <a:pt x="4297351" y="40717"/>
-                  </a:lnTo>
-                  <a:lnTo>
-                    <a:pt x="4368974" y="39696"/>
-                  </a:lnTo>
-                  <a:lnTo>
-                    <a:pt x="4440596" y="38673"/>
-                  </a:lnTo>
-                  <a:lnTo>
-                    <a:pt x="4512219" y="37650"/>
-                  </a:lnTo>
-                  <a:lnTo>
-                    <a:pt x="4583841" y="36625"/>
-                  </a:lnTo>
-                  <a:lnTo>
-                    <a:pt x="4655464" y="35599"/>
-                  </a:lnTo>
-                  <a:lnTo>
-                    <a:pt x="4727086" y="34571"/>
-                  </a:lnTo>
-                  <a:lnTo>
-                    <a:pt x="4798709" y="33543"/>
-                  </a:lnTo>
-                  <a:lnTo>
-                    <a:pt x="4870331" y="32513"/>
-                  </a:lnTo>
-                  <a:lnTo>
-                    <a:pt x="4941954" y="31483"/>
-                  </a:lnTo>
-                  <a:lnTo>
-                    <a:pt x="5013576" y="30451"/>
-                  </a:lnTo>
-                  <a:lnTo>
-                    <a:pt x="5085199" y="29417"/>
-                  </a:lnTo>
-                  <a:lnTo>
-                    <a:pt x="5156821" y="28383"/>
-                  </a:lnTo>
-                  <a:lnTo>
-                    <a:pt x="5228444" y="27348"/>
-                  </a:lnTo>
-                  <a:lnTo>
-                    <a:pt x="5300066" y="26311"/>
-                  </a:lnTo>
-                  <a:lnTo>
-                    <a:pt x="5371689" y="25273"/>
-                  </a:lnTo>
-                  <a:lnTo>
-                    <a:pt x="5443311" y="24234"/>
-                  </a:lnTo>
-                  <a:lnTo>
-                    <a:pt x="5514934" y="23193"/>
-                  </a:lnTo>
-                  <a:lnTo>
-                    <a:pt x="5586557" y="22152"/>
-                  </a:lnTo>
-                  <a:lnTo>
-                    <a:pt x="5658179" y="21109"/>
-                  </a:lnTo>
-                  <a:lnTo>
-                    <a:pt x="5729802" y="20065"/>
-                  </a:lnTo>
-                  <a:lnTo>
-                    <a:pt x="5801424" y="19020"/>
-                  </a:lnTo>
-                  <a:lnTo>
-                    <a:pt x="5873047" y="17974"/>
-                  </a:lnTo>
-                  <a:lnTo>
-                    <a:pt x="5944669" y="16926"/>
-                  </a:lnTo>
-                  <a:lnTo>
-                    <a:pt x="6016292" y="15877"/>
-                  </a:lnTo>
-                  <a:lnTo>
-                    <a:pt x="6087914" y="14827"/>
-                  </a:lnTo>
-                  <a:lnTo>
-                    <a:pt x="6159537" y="13776"/>
-                  </a:lnTo>
-                  <a:lnTo>
-                    <a:pt x="6231159" y="12724"/>
-                  </a:lnTo>
-                  <a:lnTo>
-                    <a:pt x="6302782" y="11670"/>
-                  </a:lnTo>
-                  <a:lnTo>
-                    <a:pt x="6374404" y="10615"/>
-                  </a:lnTo>
-                  <a:lnTo>
-                    <a:pt x="6446027" y="9559"/>
-                  </a:lnTo>
-                  <a:lnTo>
-                    <a:pt x="6517649" y="8502"/>
-                  </a:lnTo>
-                  <a:lnTo>
-                    <a:pt x="6589272" y="7443"/>
-                  </a:lnTo>
-                  <a:lnTo>
-                    <a:pt x="6660894" y="6384"/>
-                  </a:lnTo>
-                  <a:lnTo>
-                    <a:pt x="6732517" y="5323"/>
-                  </a:lnTo>
-                  <a:lnTo>
-                    <a:pt x="6804139" y="4260"/>
-                  </a:lnTo>
-                  <a:lnTo>
-                    <a:pt x="6875762" y="3197"/>
-                  </a:lnTo>
-                  <a:lnTo>
-                    <a:pt x="6947385" y="2132"/>
-                  </a:lnTo>
-                  <a:lnTo>
-                    <a:pt x="7019007" y="1067"/>
+                    <a:pt x="71622" y="64894"/>
+                  </a:lnTo>
+                  <a:lnTo>
+                    <a:pt x="143245" y="64256"/>
+                  </a:lnTo>
+                  <a:lnTo>
+                    <a:pt x="214867" y="63617"/>
+                  </a:lnTo>
+                  <a:lnTo>
+                    <a:pt x="286490" y="62978"/>
+                  </a:lnTo>
+                  <a:lnTo>
+                    <a:pt x="358112" y="62338"/>
+                  </a:lnTo>
+                  <a:lnTo>
+                    <a:pt x="429735" y="61698"/>
+                  </a:lnTo>
+                  <a:lnTo>
+                    <a:pt x="501357" y="61058"/>
+                  </a:lnTo>
+                  <a:lnTo>
+                    <a:pt x="572980" y="60417"/>
+                  </a:lnTo>
+                  <a:lnTo>
+                    <a:pt x="644602" y="59775"/>
+                  </a:lnTo>
+                  <a:lnTo>
+                    <a:pt x="716225" y="59133"/>
+                  </a:lnTo>
+                  <a:lnTo>
+                    <a:pt x="787847" y="58491"/>
+                  </a:lnTo>
+                  <a:lnTo>
+                    <a:pt x="859470" y="57848"/>
+                  </a:lnTo>
+                  <a:lnTo>
+                    <a:pt x="931092" y="57204"/>
+                  </a:lnTo>
+                  <a:lnTo>
+                    <a:pt x="1002715" y="56560"/>
+                  </a:lnTo>
+                  <a:lnTo>
+                    <a:pt x="1074337" y="55916"/>
+                  </a:lnTo>
+                  <a:lnTo>
+                    <a:pt x="1145960" y="55271"/>
+                  </a:lnTo>
+                  <a:lnTo>
+                    <a:pt x="1217582" y="54625"/>
+                  </a:lnTo>
+                  <a:lnTo>
+                    <a:pt x="1289205" y="53979"/>
+                  </a:lnTo>
+                  <a:lnTo>
+                    <a:pt x="1360827" y="53333"/>
+                  </a:lnTo>
+                  <a:lnTo>
+                    <a:pt x="1432450" y="52686"/>
+                  </a:lnTo>
+                  <a:lnTo>
+                    <a:pt x="1504073" y="52039"/>
+                  </a:lnTo>
+                  <a:lnTo>
+                    <a:pt x="1575695" y="51391"/>
+                  </a:lnTo>
+                  <a:lnTo>
+                    <a:pt x="1647318" y="50742"/>
+                  </a:lnTo>
+                  <a:lnTo>
+                    <a:pt x="1718940" y="50093"/>
+                  </a:lnTo>
+                  <a:lnTo>
+                    <a:pt x="1790563" y="49444"/>
+                  </a:lnTo>
+                  <a:lnTo>
+                    <a:pt x="1862185" y="48794"/>
+                  </a:lnTo>
+                  <a:lnTo>
+                    <a:pt x="1933808" y="48144"/>
+                  </a:lnTo>
+                  <a:lnTo>
+                    <a:pt x="2005430" y="47493"/>
+                  </a:lnTo>
+                  <a:lnTo>
+                    <a:pt x="2077053" y="46842"/>
+                  </a:lnTo>
+                  <a:lnTo>
+                    <a:pt x="2148675" y="46190"/>
+                  </a:lnTo>
+                  <a:lnTo>
+                    <a:pt x="2220298" y="45538"/>
+                  </a:lnTo>
+                  <a:lnTo>
+                    <a:pt x="2291920" y="44885"/>
+                  </a:lnTo>
+                  <a:lnTo>
+                    <a:pt x="2363543" y="44231"/>
+                  </a:lnTo>
+                  <a:lnTo>
+                    <a:pt x="2435165" y="43578"/>
+                  </a:lnTo>
+                  <a:lnTo>
+                    <a:pt x="2506788" y="42923"/>
+                  </a:lnTo>
+                  <a:lnTo>
+                    <a:pt x="2578410" y="42269"/>
+                  </a:lnTo>
+                  <a:lnTo>
+                    <a:pt x="2650033" y="41613"/>
+                  </a:lnTo>
+                  <a:lnTo>
+                    <a:pt x="2721655" y="40957"/>
+                  </a:lnTo>
+                  <a:lnTo>
+                    <a:pt x="2793278" y="40301"/>
+                  </a:lnTo>
+                  <a:lnTo>
+                    <a:pt x="2864901" y="39644"/>
+                  </a:lnTo>
+                  <a:lnTo>
+                    <a:pt x="2936523" y="38987"/>
+                  </a:lnTo>
+                  <a:lnTo>
+                    <a:pt x="3008146" y="38329"/>
+                  </a:lnTo>
+                  <a:lnTo>
+                    <a:pt x="3079768" y="37671"/>
+                  </a:lnTo>
+                  <a:lnTo>
+                    <a:pt x="3151391" y="37012"/>
+                  </a:lnTo>
+                  <a:lnTo>
+                    <a:pt x="3223013" y="36353"/>
+                  </a:lnTo>
+                  <a:lnTo>
+                    <a:pt x="3294636" y="35693"/>
+                  </a:lnTo>
+                  <a:lnTo>
+                    <a:pt x="3366258" y="35033"/>
+                  </a:lnTo>
+                  <a:lnTo>
+                    <a:pt x="3437881" y="34372"/>
+                  </a:lnTo>
+                  <a:lnTo>
+                    <a:pt x="3509503" y="33711"/>
+                  </a:lnTo>
+                  <a:lnTo>
+                    <a:pt x="3581126" y="33049"/>
+                  </a:lnTo>
+                  <a:lnTo>
+                    <a:pt x="3652748" y="32387"/>
+                  </a:lnTo>
+                  <a:lnTo>
+                    <a:pt x="3724371" y="31724"/>
+                  </a:lnTo>
+                  <a:lnTo>
+                    <a:pt x="3795993" y="31061"/>
+                  </a:lnTo>
+                  <a:lnTo>
+                    <a:pt x="3867616" y="30397"/>
+                  </a:lnTo>
+                  <a:lnTo>
+                    <a:pt x="3939238" y="29733"/>
+                  </a:lnTo>
+                  <a:lnTo>
+                    <a:pt x="4010861" y="29068"/>
+                  </a:lnTo>
+                  <a:lnTo>
+                    <a:pt x="4082483" y="28403"/>
+                  </a:lnTo>
+                  <a:lnTo>
+                    <a:pt x="4154106" y="27737"/>
+                  </a:lnTo>
+                  <a:lnTo>
+                    <a:pt x="4225729" y="27070"/>
+                  </a:lnTo>
+                  <a:lnTo>
+                    <a:pt x="4297351" y="26404"/>
+                  </a:lnTo>
+                  <a:lnTo>
+                    <a:pt x="4368974" y="25736"/>
+                  </a:lnTo>
+                  <a:lnTo>
+                    <a:pt x="4440596" y="25068"/>
+                  </a:lnTo>
+                  <a:lnTo>
+                    <a:pt x="4512219" y="24400"/>
+                  </a:lnTo>
+                  <a:lnTo>
+                    <a:pt x="4583841" y="23731"/>
+                  </a:lnTo>
+                  <a:lnTo>
+                    <a:pt x="4655464" y="23062"/>
+                  </a:lnTo>
+                  <a:lnTo>
+                    <a:pt x="4727086" y="22392"/>
+                  </a:lnTo>
+                  <a:lnTo>
+                    <a:pt x="4798709" y="21722"/>
+                  </a:lnTo>
+                  <a:lnTo>
+                    <a:pt x="4870331" y="21051"/>
+                  </a:lnTo>
+                  <a:lnTo>
+                    <a:pt x="4941954" y="20379"/>
+                  </a:lnTo>
+                  <a:lnTo>
+                    <a:pt x="5013576" y="19708"/>
+                  </a:lnTo>
+                  <a:lnTo>
+                    <a:pt x="5085199" y="19035"/>
+                  </a:lnTo>
+                  <a:lnTo>
+                    <a:pt x="5156821" y="18362"/>
+                  </a:lnTo>
+                  <a:lnTo>
+                    <a:pt x="5228444" y="17689"/>
+                  </a:lnTo>
+                  <a:lnTo>
+                    <a:pt x="5300066" y="17015"/>
+                  </a:lnTo>
+                  <a:lnTo>
+                    <a:pt x="5371689" y="16340"/>
+                  </a:lnTo>
+                  <a:lnTo>
+                    <a:pt x="5443311" y="15665"/>
+                  </a:lnTo>
+                  <a:lnTo>
+                    <a:pt x="5514934" y="14990"/>
+                  </a:lnTo>
+                  <a:lnTo>
+                    <a:pt x="5586557" y="14314"/>
+                  </a:lnTo>
+                  <a:lnTo>
+                    <a:pt x="5658179" y="13638"/>
+                  </a:lnTo>
+                  <a:lnTo>
+                    <a:pt x="5729802" y="12961"/>
+                  </a:lnTo>
+                  <a:lnTo>
+                    <a:pt x="5801424" y="12283"/>
+                  </a:lnTo>
+                  <a:lnTo>
+                    <a:pt x="5873047" y="11605"/>
+                  </a:lnTo>
+                  <a:lnTo>
+                    <a:pt x="5944669" y="10926"/>
+                  </a:lnTo>
+                  <a:lnTo>
+                    <a:pt x="6016292" y="10247"/>
+                  </a:lnTo>
+                  <a:lnTo>
+                    <a:pt x="6087914" y="9568"/>
+                  </a:lnTo>
+                  <a:lnTo>
+                    <a:pt x="6159537" y="8888"/>
+                  </a:lnTo>
+                  <a:lnTo>
+                    <a:pt x="6231159" y="8207"/>
+                  </a:lnTo>
+                  <a:lnTo>
+                    <a:pt x="6302782" y="7526"/>
+                  </a:lnTo>
+                  <a:lnTo>
+                    <a:pt x="6374404" y="6844"/>
+                  </a:lnTo>
+                  <a:lnTo>
+                    <a:pt x="6446027" y="6162"/>
+                  </a:lnTo>
+                  <a:lnTo>
+                    <a:pt x="6517649" y="5480"/>
+                  </a:lnTo>
+                  <a:lnTo>
+                    <a:pt x="6589272" y="4796"/>
+                  </a:lnTo>
+                  <a:lnTo>
+                    <a:pt x="6660894" y="4113"/>
+                  </a:lnTo>
+                  <a:lnTo>
+                    <a:pt x="6732517" y="3428"/>
+                  </a:lnTo>
+                  <a:lnTo>
+                    <a:pt x="6804139" y="2744"/>
+                  </a:lnTo>
+                  <a:lnTo>
+                    <a:pt x="6875762" y="2058"/>
+                  </a:lnTo>
+                  <a:lnTo>
+                    <a:pt x="6947385" y="1373"/>
+                  </a:lnTo>
+                  <a:lnTo>
+                    <a:pt x="7019007" y="686"/>
                   </a:lnTo>
                   <a:lnTo>
                     <a:pt x="7090630" y="0"/>
@@ -4617,7 +4617,7 @@
           </p:nvSpPr>
           <p:spPr>
             <a:xfrm>
-              <a:off x="4374536" y="1896563"/>
+              <a:off x="4334057" y="1896563"/>
               <a:ext cx="0" cy="3826579"/>
             </a:xfrm>
             <a:custGeom>
@@ -4890,7 +4890,7 @@
           </p:nvSpPr>
           <p:spPr>
             <a:xfrm>
-              <a:off x="2009531" y="5785772"/>
+              <a:off x="2008892" y="5785772"/>
               <a:ext cx="223753" cy="80101"/>
             </a:xfrm>
             <a:prstGeom prst="rect">
@@ -4936,7 +4936,7 @@
           </p:nvSpPr>
           <p:spPr>
             <a:xfrm>
-              <a:off x="4372762" y="5785772"/>
+              <a:off x="4369739" y="5785772"/>
               <a:ext cx="62179" cy="80101"/>
             </a:xfrm>
             <a:prstGeom prst="rect">
@@ -4982,7 +4982,7 @@
           </p:nvSpPr>
           <p:spPr>
             <a:xfrm>
-              <a:off x="6593026" y="5785772"/>
+              <a:off x="6587619" y="5785772"/>
               <a:ext cx="186537" cy="80101"/>
             </a:xfrm>
             <a:prstGeom prst="rect">
